--- a/Redis i Mongo.pptx
+++ b/Redis i Mongo.pptx
@@ -9,6 +9,15 @@
     <p:sldId id="257" r:id="rId3"/>
     <p:sldId id="258" r:id="rId4"/>
     <p:sldId id="259" r:id="rId5"/>
+    <p:sldId id="260" r:id="rId6"/>
+    <p:sldId id="261" r:id="rId7"/>
+    <p:sldId id="262" r:id="rId8"/>
+    <p:sldId id="263" r:id="rId9"/>
+    <p:sldId id="264" r:id="rId10"/>
+    <p:sldId id="265" r:id="rId11"/>
+    <p:sldId id="266" r:id="rId12"/>
+    <p:sldId id="267" r:id="rId13"/>
+    <p:sldId id="268" r:id="rId14"/>
   </p:sldIdLst>
   <p:sldSz cx="12192000" cy="6858000"/>
   <p:notesSz cx="6858000" cy="9144000"/>
@@ -107,6 +116,11 @@
       </a:defRPr>
     </a:lvl9pPr>
   </p:defaultTextStyle>
+  <p:extLst>
+    <p:ext uri="{EFAFB233-063F-42B5-8137-9DF3F51BA10A}">
+      <p15:sldGuideLst xmlns:p15="http://schemas.microsoft.com/office/powerpoint/2012/main"/>
+    </p:ext>
+  </p:extLst>
 </p:presentation>
 </file>
 
@@ -3391,6 +3405,1294 @@
 </p:sld>
 </file>
 
+<file path=ppt/slides/slide10.xml><?xml version="1.0" encoding="utf-8"?>
+<p:sld xmlns:a="http://schemas.openxmlformats.org/drawingml/2006/main" xmlns:r="http://schemas.openxmlformats.org/officeDocument/2006/relationships" xmlns:p="http://schemas.openxmlformats.org/presentationml/2006/main">
+  <p:cSld>
+    <p:spTree>
+      <p:nvGrpSpPr>
+        <p:cNvPr id="1" name=""/>
+        <p:cNvGrpSpPr/>
+        <p:nvPr/>
+      </p:nvGrpSpPr>
+      <p:grpSpPr>
+        <a:xfrm>
+          <a:off x="0" y="0"/>
+          <a:ext cx="0" cy="0"/>
+          <a:chOff x="0" y="0"/>
+          <a:chExt cx="0" cy="0"/>
+        </a:xfrm>
+      </p:grpSpPr>
+      <p:sp>
+        <p:nvSpPr>
+          <p:cNvPr id="2" name="Title 1">
+            <a:extLst>
+              <a:ext uri="{FF2B5EF4-FFF2-40B4-BE49-F238E27FC236}">
+                <a16:creationId xmlns:a16="http://schemas.microsoft.com/office/drawing/2014/main" id="{7FD3B602-E2DB-E2F6-761D-B0938630FBE2}"/>
+              </a:ext>
+            </a:extLst>
+          </p:cNvPr>
+          <p:cNvSpPr>
+            <a:spLocks noGrp="1"/>
+          </p:cNvSpPr>
+          <p:nvPr>
+            <p:ph type="title"/>
+          </p:nvPr>
+        </p:nvSpPr>
+        <p:spPr/>
+        <p:txBody>
+          <a:bodyPr/>
+          <a:lstStyle/>
+          <a:p>
+            <a:r>
+              <a:rPr lang="sr-Latn-RS" dirty="0"/>
+              <a:t>AOF perzistencija</a:t>
+            </a:r>
+            <a:endParaRPr lang="en-US" dirty="0"/>
+          </a:p>
+        </p:txBody>
+      </p:sp>
+      <p:sp>
+        <p:nvSpPr>
+          <p:cNvPr id="3" name="Content Placeholder 2">
+            <a:extLst>
+              <a:ext uri="{FF2B5EF4-FFF2-40B4-BE49-F238E27FC236}">
+                <a16:creationId xmlns:a16="http://schemas.microsoft.com/office/drawing/2014/main" id="{8A4302DE-1AAE-771C-AE19-CCE654E1916A}"/>
+              </a:ext>
+            </a:extLst>
+          </p:cNvPr>
+          <p:cNvSpPr>
+            <a:spLocks noGrp="1"/>
+          </p:cNvSpPr>
+          <p:nvPr>
+            <p:ph idx="1"/>
+          </p:nvPr>
+        </p:nvSpPr>
+        <p:spPr>
+          <a:xfrm>
+            <a:off x="838200" y="1442906"/>
+            <a:ext cx="10515600" cy="4734057"/>
+          </a:xfrm>
+        </p:spPr>
+        <p:txBody>
+          <a:bodyPr>
+            <a:normAutofit fontScale="92500" lnSpcReduction="20000"/>
+          </a:bodyPr>
+          <a:lstStyle/>
+          <a:p>
+            <a:r>
+              <a:rPr lang="sr-Latn-RS" dirty="0"/>
+              <a:t>AOF je skraćenica od Append Only File, i on beleži svaki upis koji server primi. Ideja iza ovoga je da, kad se server pokrene, taj niz operacija se izvrši nad podacima i rekonstruiše stabilno stanje. Logovi se beleže u istom formatu kao Redis komande. Redis omogućava 3 režima konfiguracije AOF-a:</a:t>
+            </a:r>
+            <a:endParaRPr lang="en-US" dirty="0"/>
+          </a:p>
+          <a:p>
+            <a:pPr lvl="1"/>
+            <a:r>
+              <a:rPr lang="sr-Latn-RS" dirty="0"/>
+              <a:t>Fsync() na svaki upis</a:t>
+            </a:r>
+            <a:endParaRPr lang="en-US" dirty="0"/>
+          </a:p>
+          <a:p>
+            <a:pPr lvl="1"/>
+            <a:r>
+              <a:rPr lang="sr-Latn-RS" dirty="0"/>
+              <a:t>Fsync() na svaku sekundu</a:t>
+            </a:r>
+            <a:endParaRPr lang="en-US" dirty="0"/>
+          </a:p>
+          <a:p>
+            <a:pPr lvl="1"/>
+            <a:r>
+              <a:rPr lang="sr-Latn-RS" dirty="0"/>
+              <a:t>Gašenje upisa u potpunosti</a:t>
+            </a:r>
+          </a:p>
+          <a:p>
+            <a:r>
+              <a:rPr lang="sr-Latn-RS" dirty="0"/>
+              <a:t>Fsync() je sistemski poziv koji sinhronizuje podatke od fajl bafera  u disk. Izbor nekog od ovih režima zavisi od toga koliko se toleriše gubitak podataka. Ako gubitak podataka ima ogromnu cenu, onda se koristi režim koji radi na svaki upis, inače se koristi onaj koji ide na svaku sekundu. Po prirodi stvari režim upisa od jedne sekunde traje između jedne i dve sekunde, i to je podrazumevani način rada Redisa kod upotrebe AOF-a.</a:t>
+            </a:r>
+          </a:p>
+        </p:txBody>
+      </p:sp>
+    </p:spTree>
+    <p:extLst>
+      <p:ext uri="{BB962C8B-B14F-4D97-AF65-F5344CB8AC3E}">
+        <p14:creationId xmlns:p14="http://schemas.microsoft.com/office/powerpoint/2010/main" val="3590764546"/>
+      </p:ext>
+    </p:extLst>
+  </p:cSld>
+  <p:clrMapOvr>
+    <a:masterClrMapping/>
+  </p:clrMapOvr>
+</p:sld>
+</file>
+
+<file path=ppt/slides/slide11.xml><?xml version="1.0" encoding="utf-8"?>
+<p:sld xmlns:a="http://schemas.openxmlformats.org/drawingml/2006/main" xmlns:r="http://schemas.openxmlformats.org/officeDocument/2006/relationships" xmlns:p="http://schemas.openxmlformats.org/presentationml/2006/main">
+  <p:cSld>
+    <p:spTree>
+      <p:nvGrpSpPr>
+        <p:cNvPr id="1" name="">
+          <a:extLst>
+            <a:ext uri="{FF2B5EF4-FFF2-40B4-BE49-F238E27FC236}">
+              <a16:creationId xmlns:a16="http://schemas.microsoft.com/office/drawing/2014/main" id="{63DC5258-D75B-C837-53D3-DBC2CDF00F85}"/>
+            </a:ext>
+          </a:extLst>
+        </p:cNvPr>
+        <p:cNvGrpSpPr/>
+        <p:nvPr/>
+      </p:nvGrpSpPr>
+      <p:grpSpPr>
+        <a:xfrm>
+          <a:off x="0" y="0"/>
+          <a:ext cx="0" cy="0"/>
+          <a:chOff x="0" y="0"/>
+          <a:chExt cx="0" cy="0"/>
+        </a:xfrm>
+      </p:grpSpPr>
+      <p:sp>
+        <p:nvSpPr>
+          <p:cNvPr id="2" name="Title 1">
+            <a:extLst>
+              <a:ext uri="{FF2B5EF4-FFF2-40B4-BE49-F238E27FC236}">
+                <a16:creationId xmlns:a16="http://schemas.microsoft.com/office/drawing/2014/main" id="{F3C2FB0B-2A96-9E22-D7B3-B85DABB51F43}"/>
+              </a:ext>
+            </a:extLst>
+          </p:cNvPr>
+          <p:cNvSpPr>
+            <a:spLocks noGrp="1"/>
+          </p:cNvSpPr>
+          <p:nvPr>
+            <p:ph type="title"/>
+          </p:nvPr>
+        </p:nvSpPr>
+        <p:spPr/>
+        <p:txBody>
+          <a:bodyPr/>
+          <a:lstStyle/>
+          <a:p>
+            <a:r>
+              <a:rPr lang="sr-Latn-RS" dirty="0"/>
+              <a:t>AOF perzistencija 2</a:t>
+            </a:r>
+            <a:endParaRPr lang="en-US" dirty="0"/>
+          </a:p>
+        </p:txBody>
+      </p:sp>
+      <p:sp>
+        <p:nvSpPr>
+          <p:cNvPr id="3" name="Content Placeholder 2">
+            <a:extLst>
+              <a:ext uri="{FF2B5EF4-FFF2-40B4-BE49-F238E27FC236}">
+                <a16:creationId xmlns:a16="http://schemas.microsoft.com/office/drawing/2014/main" id="{A9E89980-9311-CFC0-6100-9ACB4AA510A4}"/>
+              </a:ext>
+            </a:extLst>
+          </p:cNvPr>
+          <p:cNvSpPr>
+            <a:spLocks noGrp="1"/>
+          </p:cNvSpPr>
+          <p:nvPr>
+            <p:ph idx="1"/>
+          </p:nvPr>
+        </p:nvSpPr>
+        <p:spPr>
+          <a:xfrm>
+            <a:off x="838200" y="1690688"/>
+            <a:ext cx="10515600" cy="4734057"/>
+          </a:xfrm>
+        </p:spPr>
+        <p:txBody>
+          <a:bodyPr>
+            <a:normAutofit lnSpcReduction="10000"/>
+          </a:bodyPr>
+          <a:lstStyle/>
+          <a:p>
+            <a:r>
+              <a:rPr lang="sr-Latn-RS" dirty="0"/>
+              <a:t>Kako se izvršavaju operacije upisa, AOF fajl se vremenom uvećava i to potencijalno može stvoriti problem. Primera radi, postoji neki brojač koji se povećao 100 puta. U samom skupu podataka postojaće samo jedna konačna vrednost, dok će AOF sadržati svih 100 pojedinačnih operacija. Od svih tih zapisa, samo je jedan, i to poslednji, potreban za rekonstrukciju stanja.</a:t>
+            </a:r>
+            <a:endParaRPr lang="en-US" dirty="0"/>
+          </a:p>
+          <a:p>
+            <a:r>
+              <a:rPr lang="sr-Latn-RS" dirty="0"/>
+              <a:t>Zbog toga Redis koristi mehanizam smanjivanja AOF fajla (rewrite), koji je u potpunosti bezbedan. Dok sistem nastavlja da upisuje nove promene u postojeći fajl, paralelno se u pozadini kreira novi fajl sa minimalnim skupom operacija potrebnih da se dobije trenutno stanje podataka. Kada se taj proces završi, Redis jednostavno zamenjuje stari fajl novim i nastavlja rad bez prekida.</a:t>
+            </a:r>
+            <a:endParaRPr lang="en-US" dirty="0"/>
+          </a:p>
+        </p:txBody>
+      </p:sp>
+    </p:spTree>
+    <p:extLst>
+      <p:ext uri="{BB962C8B-B14F-4D97-AF65-F5344CB8AC3E}">
+        <p14:creationId xmlns:p14="http://schemas.microsoft.com/office/powerpoint/2010/main" val="4037980748"/>
+      </p:ext>
+    </p:extLst>
+  </p:cSld>
+  <p:clrMapOvr>
+    <a:masterClrMapping/>
+  </p:clrMapOvr>
+</p:sld>
+</file>
+
+<file path=ppt/slides/slide12.xml><?xml version="1.0" encoding="utf-8"?>
+<p:sld xmlns:a="http://schemas.openxmlformats.org/drawingml/2006/main" xmlns:r="http://schemas.openxmlformats.org/officeDocument/2006/relationships" xmlns:p="http://schemas.openxmlformats.org/presentationml/2006/main">
+  <p:cSld>
+    <p:bg>
+      <p:bgPr>
+        <a:solidFill>
+          <a:schemeClr val="bg1"/>
+        </a:solidFill>
+        <a:effectLst/>
+      </p:bgPr>
+    </p:bg>
+    <p:spTree>
+      <p:nvGrpSpPr>
+        <p:cNvPr id="1" name=""/>
+        <p:cNvGrpSpPr/>
+        <p:nvPr/>
+      </p:nvGrpSpPr>
+      <p:grpSpPr>
+        <a:xfrm>
+          <a:off x="0" y="0"/>
+          <a:ext cx="0" cy="0"/>
+          <a:chOff x="0" y="0"/>
+          <a:chExt cx="0" cy="0"/>
+        </a:xfrm>
+      </p:grpSpPr>
+      <p:sp>
+        <p:nvSpPr>
+          <p:cNvPr id="9" name="Rectangle 8">
+            <a:extLst>
+              <a:ext uri="{FF2B5EF4-FFF2-40B4-BE49-F238E27FC236}">
+                <a16:creationId xmlns:a16="http://schemas.microsoft.com/office/drawing/2014/main" id="{F3060C83-F051-4F0E-ABAD-AA0DFC48B218}"/>
+              </a:ext>
+              <a:ext uri="{C183D7F6-B498-43B3-948B-1728B52AA6E4}">
+                <adec:decorative xmlns:adec="http://schemas.microsoft.com/office/drawing/2017/decorative" val="1"/>
+              </a:ext>
+            </a:extLst>
+          </p:cNvPr>
+          <p:cNvSpPr>
+            <a:spLocks noGrp="1" noRot="1" noChangeAspect="1" noMove="1" noResize="1" noEditPoints="1" noAdjustHandles="1" noChangeArrowheads="1" noChangeShapeType="1" noTextEdit="1"/>
+          </p:cNvSpPr>
+          <p:nvPr>
+            <p:extLst>
+              <p:ext uri="{386F3935-93C4-4BCD-93E2-E3B085C9AB24}">
+                <p16:designElem xmlns:p16="http://schemas.microsoft.com/office/powerpoint/2015/main" val="1"/>
+              </p:ext>
+            </p:extLst>
+          </p:nvPr>
+        </p:nvSpPr>
+        <p:spPr>
+          <a:xfrm>
+            <a:off x="0" y="0"/>
+            <a:ext cx="12192000" cy="6858000"/>
+          </a:xfrm>
+          <a:prstGeom prst="rect">
+            <a:avLst/>
+          </a:prstGeom>
+          <a:solidFill>
+            <a:schemeClr val="bg1"/>
+          </a:solidFill>
+          <a:ln>
+            <a:noFill/>
+          </a:ln>
+        </p:spPr>
+        <p:style>
+          <a:lnRef idx="2">
+            <a:schemeClr val="accent1">
+              <a:shade val="50000"/>
+            </a:schemeClr>
+          </a:lnRef>
+          <a:fillRef idx="1">
+            <a:schemeClr val="accent1"/>
+          </a:fillRef>
+          <a:effectRef idx="0">
+            <a:schemeClr val="accent1"/>
+          </a:effectRef>
+          <a:fontRef idx="minor">
+            <a:schemeClr val="lt1"/>
+          </a:fontRef>
+        </p:style>
+        <p:txBody>
+          <a:bodyPr rtlCol="0" anchor="ctr"/>
+          <a:lstStyle/>
+          <a:p>
+            <a:pPr algn="ctr"/>
+            <a:endParaRPr lang="en-US" dirty="0"/>
+          </a:p>
+        </p:txBody>
+      </p:sp>
+      <p:sp>
+        <p:nvSpPr>
+          <p:cNvPr id="11" name="Freeform: Shape 10">
+            <a:extLst>
+              <a:ext uri="{FF2B5EF4-FFF2-40B4-BE49-F238E27FC236}">
+                <a16:creationId xmlns:a16="http://schemas.microsoft.com/office/drawing/2014/main" id="{83C98ABE-055B-441F-B07E-44F97F083C39}"/>
+              </a:ext>
+              <a:ext uri="{C183D7F6-B498-43B3-948B-1728B52AA6E4}">
+                <adec:decorative xmlns:adec="http://schemas.microsoft.com/office/drawing/2017/decorative" val="1"/>
+              </a:ext>
+            </a:extLst>
+          </p:cNvPr>
+          <p:cNvSpPr>
+            <a:spLocks noGrp="1" noRot="1" noChangeAspect="1" noMove="1" noResize="1" noEditPoints="1" noAdjustHandles="1" noChangeArrowheads="1" noChangeShapeType="1" noTextEdit="1"/>
+          </p:cNvSpPr>
+          <p:nvPr>
+            <p:extLst>
+              <p:ext uri="{386F3935-93C4-4BCD-93E2-E3B085C9AB24}">
+                <p16:designElem xmlns:p16="http://schemas.microsoft.com/office/powerpoint/2015/main" val="1"/>
+              </p:ext>
+            </p:extLst>
+          </p:nvPr>
+        </p:nvSpPr>
+        <p:spPr>
+          <a:xfrm rot="18900000" flipH="1">
+            <a:off x="-376156" y="-253670"/>
+            <a:ext cx="1827638" cy="1376989"/>
+          </a:xfrm>
+          <a:custGeom>
+            <a:avLst/>
+            <a:gdLst>
+              <a:gd name="connsiteX0" fmla="*/ 0 w 1827638"/>
+              <a:gd name="connsiteY0" fmla="*/ 987379 h 1376989"/>
+              <a:gd name="connsiteX1" fmla="*/ 987379 w 1827638"/>
+              <a:gd name="connsiteY1" fmla="*/ 0 h 1376989"/>
+              <a:gd name="connsiteX2" fmla="*/ 1827638 w 1827638"/>
+              <a:gd name="connsiteY2" fmla="*/ 840260 h 1376989"/>
+              <a:gd name="connsiteX3" fmla="*/ 1827638 w 1827638"/>
+              <a:gd name="connsiteY3" fmla="*/ 1376989 h 1376989"/>
+              <a:gd name="connsiteX4" fmla="*/ 0 w 1827638"/>
+              <a:gd name="connsiteY4" fmla="*/ 1376989 h 1376989"/>
+            </a:gdLst>
+            <a:ahLst/>
+            <a:cxnLst>
+              <a:cxn ang="0">
+                <a:pos x="connsiteX0" y="connsiteY0"/>
+              </a:cxn>
+              <a:cxn ang="0">
+                <a:pos x="connsiteX1" y="connsiteY1"/>
+              </a:cxn>
+              <a:cxn ang="0">
+                <a:pos x="connsiteX2" y="connsiteY2"/>
+              </a:cxn>
+              <a:cxn ang="0">
+                <a:pos x="connsiteX3" y="connsiteY3"/>
+              </a:cxn>
+              <a:cxn ang="0">
+                <a:pos x="connsiteX4" y="connsiteY4"/>
+              </a:cxn>
+            </a:cxnLst>
+            <a:rect l="l" t="t" r="r" b="b"/>
+            <a:pathLst>
+              <a:path w="1827638" h="1376989">
+                <a:moveTo>
+                  <a:pt x="0" y="987379"/>
+                </a:moveTo>
+                <a:lnTo>
+                  <a:pt x="987379" y="0"/>
+                </a:lnTo>
+                <a:lnTo>
+                  <a:pt x="1827638" y="840260"/>
+                </a:lnTo>
+                <a:lnTo>
+                  <a:pt x="1827638" y="1376989"/>
+                </a:lnTo>
+                <a:lnTo>
+                  <a:pt x="0" y="1376989"/>
+                </a:lnTo>
+                <a:close/>
+              </a:path>
+            </a:pathLst>
+          </a:custGeom>
+          <a:solidFill>
+            <a:schemeClr val="accent1">
+              <a:alpha val="30000"/>
+            </a:schemeClr>
+          </a:solidFill>
+          <a:ln>
+            <a:noFill/>
+          </a:ln>
+        </p:spPr>
+        <p:style>
+          <a:lnRef idx="2">
+            <a:schemeClr val="accent1">
+              <a:shade val="50000"/>
+            </a:schemeClr>
+          </a:lnRef>
+          <a:fillRef idx="1">
+            <a:schemeClr val="accent1"/>
+          </a:fillRef>
+          <a:effectRef idx="0">
+            <a:schemeClr val="accent1"/>
+          </a:effectRef>
+          <a:fontRef idx="minor">
+            <a:schemeClr val="lt1"/>
+          </a:fontRef>
+        </p:style>
+        <p:txBody>
+          <a:bodyPr rtlCol="0" anchor="ctr"/>
+          <a:lstStyle/>
+          <a:p>
+            <a:pPr algn="ctr"/>
+            <a:endParaRPr lang="en-US" dirty="0"/>
+          </a:p>
+        </p:txBody>
+      </p:sp>
+      <p:sp>
+        <p:nvSpPr>
+          <p:cNvPr id="13" name="Rectangle 12">
+            <a:extLst>
+              <a:ext uri="{FF2B5EF4-FFF2-40B4-BE49-F238E27FC236}">
+                <a16:creationId xmlns:a16="http://schemas.microsoft.com/office/drawing/2014/main" id="{29FDB030-9B49-4CED-8CCD-4D99382388AC}"/>
+              </a:ext>
+              <a:ext uri="{C183D7F6-B498-43B3-948B-1728B52AA6E4}">
+                <adec:decorative xmlns:adec="http://schemas.microsoft.com/office/drawing/2017/decorative" val="1"/>
+              </a:ext>
+            </a:extLst>
+          </p:cNvPr>
+          <p:cNvSpPr>
+            <a:spLocks noGrp="1" noRot="1" noChangeAspect="1" noMove="1" noResize="1" noEditPoints="1" noAdjustHandles="1" noChangeArrowheads="1" noChangeShapeType="1" noTextEdit="1"/>
+          </p:cNvSpPr>
+          <p:nvPr>
+            <p:extLst>
+              <p:ext uri="{386F3935-93C4-4BCD-93E2-E3B085C9AB24}">
+                <p16:designElem xmlns:p16="http://schemas.microsoft.com/office/powerpoint/2015/main" val="1"/>
+              </p:ext>
+            </p:extLst>
+          </p:nvPr>
+        </p:nvSpPr>
+        <p:spPr>
+          <a:xfrm rot="18900000" flipH="1">
+            <a:off x="891641" y="422146"/>
+            <a:ext cx="645368" cy="645368"/>
+          </a:xfrm>
+          <a:prstGeom prst="rect">
+            <a:avLst/>
+          </a:prstGeom>
+          <a:solidFill>
+            <a:schemeClr val="accent1">
+              <a:alpha val="30000"/>
+            </a:schemeClr>
+          </a:solidFill>
+          <a:ln>
+            <a:noFill/>
+          </a:ln>
+        </p:spPr>
+        <p:style>
+          <a:lnRef idx="2">
+            <a:schemeClr val="accent1">
+              <a:shade val="50000"/>
+            </a:schemeClr>
+          </a:lnRef>
+          <a:fillRef idx="1">
+            <a:schemeClr val="accent1"/>
+          </a:fillRef>
+          <a:effectRef idx="0">
+            <a:schemeClr val="accent1"/>
+          </a:effectRef>
+          <a:fontRef idx="minor">
+            <a:schemeClr val="lt1"/>
+          </a:fontRef>
+        </p:style>
+        <p:txBody>
+          <a:bodyPr rtlCol="0" anchor="ctr"/>
+          <a:lstStyle/>
+          <a:p>
+            <a:pPr algn="ctr"/>
+            <a:endParaRPr lang="en-US"/>
+          </a:p>
+        </p:txBody>
+      </p:sp>
+      <p:sp>
+        <p:nvSpPr>
+          <p:cNvPr id="15" name="Rectangle 14">
+            <a:extLst>
+              <a:ext uri="{FF2B5EF4-FFF2-40B4-BE49-F238E27FC236}">
+                <a16:creationId xmlns:a16="http://schemas.microsoft.com/office/drawing/2014/main" id="{3783CA14-24A1-485C-8B30-D6A5D87987AD}"/>
+              </a:ext>
+              <a:ext uri="{C183D7F6-B498-43B3-948B-1728B52AA6E4}">
+                <adec:decorative xmlns:adec="http://schemas.microsoft.com/office/drawing/2017/decorative" val="1"/>
+              </a:ext>
+            </a:extLst>
+          </p:cNvPr>
+          <p:cNvSpPr>
+            <a:spLocks noGrp="1" noRot="1" noChangeAspect="1" noMove="1" noResize="1" noEditPoints="1" noAdjustHandles="1" noChangeArrowheads="1" noChangeShapeType="1" noTextEdit="1"/>
+          </p:cNvSpPr>
+          <p:nvPr>
+            <p:extLst>
+              <p:ext uri="{386F3935-93C4-4BCD-93E2-E3B085C9AB24}">
+                <p16:designElem xmlns:p16="http://schemas.microsoft.com/office/powerpoint/2015/main" val="1"/>
+              </p:ext>
+            </p:extLst>
+          </p:nvPr>
+        </p:nvSpPr>
+        <p:spPr>
+          <a:xfrm rot="18900000" flipH="1">
+            <a:off x="10043482" y="655140"/>
+            <a:ext cx="687472" cy="687472"/>
+          </a:xfrm>
+          <a:prstGeom prst="rect">
+            <a:avLst/>
+          </a:prstGeom>
+          <a:solidFill>
+            <a:schemeClr val="accent4">
+              <a:alpha val="30000"/>
+            </a:schemeClr>
+          </a:solidFill>
+          <a:ln>
+            <a:noFill/>
+          </a:ln>
+        </p:spPr>
+        <p:style>
+          <a:lnRef idx="2">
+            <a:schemeClr val="accent1">
+              <a:shade val="50000"/>
+            </a:schemeClr>
+          </a:lnRef>
+          <a:fillRef idx="1">
+            <a:schemeClr val="accent1"/>
+          </a:fillRef>
+          <a:effectRef idx="0">
+            <a:schemeClr val="accent1"/>
+          </a:effectRef>
+          <a:fontRef idx="minor">
+            <a:schemeClr val="lt1"/>
+          </a:fontRef>
+        </p:style>
+        <p:txBody>
+          <a:bodyPr rtlCol="0" anchor="ctr"/>
+          <a:lstStyle/>
+          <a:p>
+            <a:pPr algn="ctr"/>
+            <a:endParaRPr lang="en-US"/>
+          </a:p>
+        </p:txBody>
+      </p:sp>
+      <p:sp>
+        <p:nvSpPr>
+          <p:cNvPr id="17" name="Freeform: Shape 16">
+            <a:extLst>
+              <a:ext uri="{FF2B5EF4-FFF2-40B4-BE49-F238E27FC236}">
+                <a16:creationId xmlns:a16="http://schemas.microsoft.com/office/drawing/2014/main" id="{9A97C86A-04D6-40F7-AE84-31AB43E6A846}"/>
+              </a:ext>
+              <a:ext uri="{C183D7F6-B498-43B3-948B-1728B52AA6E4}">
+                <adec:decorative xmlns:adec="http://schemas.microsoft.com/office/drawing/2017/decorative" val="1"/>
+              </a:ext>
+            </a:extLst>
+          </p:cNvPr>
+          <p:cNvSpPr>
+            <a:spLocks noGrp="1" noRot="1" noChangeAspect="1" noMove="1" noResize="1" noEditPoints="1" noAdjustHandles="1" noChangeArrowheads="1" noChangeShapeType="1" noTextEdit="1"/>
+          </p:cNvSpPr>
+          <p:nvPr>
+            <p:extLst>
+              <p:ext uri="{386F3935-93C4-4BCD-93E2-E3B085C9AB24}">
+                <p16:designElem xmlns:p16="http://schemas.microsoft.com/office/powerpoint/2015/main" val="1"/>
+              </p:ext>
+            </p:extLst>
+          </p:nvPr>
+        </p:nvSpPr>
+        <p:spPr>
+          <a:xfrm rot="10800000" flipH="1">
+            <a:off x="9356643" y="0"/>
+            <a:ext cx="2835357" cy="1480837"/>
+          </a:xfrm>
+          <a:custGeom>
+            <a:avLst/>
+            <a:gdLst>
+              <a:gd name="connsiteX0" fmla="*/ 2835357 w 2835357"/>
+              <a:gd name="connsiteY0" fmla="*/ 1480837 h 1480837"/>
+              <a:gd name="connsiteX1" fmla="*/ 0 w 2835357"/>
+              <a:gd name="connsiteY1" fmla="*/ 1480837 h 1480837"/>
+              <a:gd name="connsiteX2" fmla="*/ 1552727 w 2835357"/>
+              <a:gd name="connsiteY2" fmla="*/ 0 h 1480837"/>
+              <a:gd name="connsiteX3" fmla="*/ 2835357 w 2835357"/>
+              <a:gd name="connsiteY3" fmla="*/ 1223245 h 1480837"/>
+            </a:gdLst>
+            <a:ahLst/>
+            <a:cxnLst>
+              <a:cxn ang="0">
+                <a:pos x="connsiteX0" y="connsiteY0"/>
+              </a:cxn>
+              <a:cxn ang="0">
+                <a:pos x="connsiteX1" y="connsiteY1"/>
+              </a:cxn>
+              <a:cxn ang="0">
+                <a:pos x="connsiteX2" y="connsiteY2"/>
+              </a:cxn>
+              <a:cxn ang="0">
+                <a:pos x="connsiteX3" y="connsiteY3"/>
+              </a:cxn>
+            </a:cxnLst>
+            <a:rect l="l" t="t" r="r" b="b"/>
+            <a:pathLst>
+              <a:path w="2835357" h="1480837">
+                <a:moveTo>
+                  <a:pt x="2835357" y="1480837"/>
+                </a:moveTo>
+                <a:lnTo>
+                  <a:pt x="0" y="1480837"/>
+                </a:lnTo>
+                <a:lnTo>
+                  <a:pt x="1552727" y="0"/>
+                </a:lnTo>
+                <a:lnTo>
+                  <a:pt x="2835357" y="1223245"/>
+                </a:lnTo>
+                <a:close/>
+              </a:path>
+            </a:pathLst>
+          </a:custGeom>
+          <a:solidFill>
+            <a:schemeClr val="accent4">
+              <a:alpha val="30000"/>
+            </a:schemeClr>
+          </a:solidFill>
+          <a:ln>
+            <a:noFill/>
+          </a:ln>
+        </p:spPr>
+        <p:style>
+          <a:lnRef idx="2">
+            <a:schemeClr val="accent1">
+              <a:shade val="50000"/>
+            </a:schemeClr>
+          </a:lnRef>
+          <a:fillRef idx="1">
+            <a:schemeClr val="accent1"/>
+          </a:fillRef>
+          <a:effectRef idx="0">
+            <a:schemeClr val="accent1"/>
+          </a:effectRef>
+          <a:fontRef idx="minor">
+            <a:schemeClr val="lt1"/>
+          </a:fontRef>
+        </p:style>
+        <p:txBody>
+          <a:bodyPr wrap="square" rtlCol="0" anchor="ctr">
+            <a:noAutofit/>
+          </a:bodyPr>
+          <a:lstStyle/>
+          <a:p>
+            <a:pPr algn="ctr"/>
+            <a:endParaRPr lang="en-US" dirty="0"/>
+          </a:p>
+        </p:txBody>
+      </p:sp>
+      <p:sp>
+        <p:nvSpPr>
+          <p:cNvPr id="19" name="Isosceles Triangle 18">
+            <a:extLst>
+              <a:ext uri="{FF2B5EF4-FFF2-40B4-BE49-F238E27FC236}">
+                <a16:creationId xmlns:a16="http://schemas.microsoft.com/office/drawing/2014/main" id="{FF9F2414-84E8-453E-B1F3-389FDE8192D9}"/>
+              </a:ext>
+              <a:ext uri="{C183D7F6-B498-43B3-948B-1728B52AA6E4}">
+                <adec:decorative xmlns:adec="http://schemas.microsoft.com/office/drawing/2017/decorative" val="1"/>
+              </a:ext>
+            </a:extLst>
+          </p:cNvPr>
+          <p:cNvSpPr>
+            <a:spLocks noGrp="1" noRot="1" noChangeAspect="1" noMove="1" noResize="1" noEditPoints="1" noAdjustHandles="1" noChangeArrowheads="1" noChangeShapeType="1" noTextEdit="1"/>
+          </p:cNvSpPr>
+          <p:nvPr>
+            <p:extLst>
+              <p:ext uri="{386F3935-93C4-4BCD-93E2-E3B085C9AB24}">
+                <p16:designElem xmlns:p16="http://schemas.microsoft.com/office/powerpoint/2015/main" val="1"/>
+              </p:ext>
+            </p:extLst>
+          </p:nvPr>
+        </p:nvSpPr>
+        <p:spPr>
+          <a:xfrm flipH="1">
+            <a:off x="7976344" y="6115501"/>
+            <a:ext cx="1494513" cy="742499"/>
+          </a:xfrm>
+          <a:prstGeom prst="triangle">
+            <a:avLst/>
+          </a:prstGeom>
+          <a:solidFill>
+            <a:schemeClr val="accent1">
+              <a:alpha val="30000"/>
+            </a:schemeClr>
+          </a:solidFill>
+          <a:ln>
+            <a:noFill/>
+          </a:ln>
+        </p:spPr>
+        <p:style>
+          <a:lnRef idx="2">
+            <a:schemeClr val="accent1">
+              <a:shade val="50000"/>
+            </a:schemeClr>
+          </a:lnRef>
+          <a:fillRef idx="1">
+            <a:schemeClr val="accent1"/>
+          </a:fillRef>
+          <a:effectRef idx="0">
+            <a:schemeClr val="accent1"/>
+          </a:effectRef>
+          <a:fontRef idx="minor">
+            <a:schemeClr val="lt1"/>
+          </a:fontRef>
+        </p:style>
+        <p:txBody>
+          <a:bodyPr rtlCol="0" anchor="ctr"/>
+          <a:lstStyle/>
+          <a:p>
+            <a:pPr algn="ctr"/>
+            <a:endParaRPr lang="en-US"/>
+          </a:p>
+        </p:txBody>
+      </p:sp>
+      <p:sp>
+        <p:nvSpPr>
+          <p:cNvPr id="21" name="Isosceles Triangle 20">
+            <a:extLst>
+              <a:ext uri="{FF2B5EF4-FFF2-40B4-BE49-F238E27FC236}">
+                <a16:creationId xmlns:a16="http://schemas.microsoft.com/office/drawing/2014/main" id="{3ECA69A1-7536-43AC-85EF-C7106179F5ED}"/>
+              </a:ext>
+              <a:ext uri="{C183D7F6-B498-43B3-948B-1728B52AA6E4}">
+                <adec:decorative xmlns:adec="http://schemas.microsoft.com/office/drawing/2017/decorative" val="1"/>
+              </a:ext>
+            </a:extLst>
+          </p:cNvPr>
+          <p:cNvSpPr>
+            <a:spLocks noGrp="1" noRot="1" noChangeAspect="1" noMove="1" noResize="1" noEditPoints="1" noAdjustHandles="1" noChangeArrowheads="1" noChangeShapeType="1" noTextEdit="1"/>
+          </p:cNvSpPr>
+          <p:nvPr>
+            <p:extLst>
+              <p:ext uri="{386F3935-93C4-4BCD-93E2-E3B085C9AB24}">
+                <p16:designElem xmlns:p16="http://schemas.microsoft.com/office/powerpoint/2015/main" val="1"/>
+              </p:ext>
+            </p:extLst>
+          </p:nvPr>
+        </p:nvSpPr>
+        <p:spPr>
+          <a:xfrm flipH="1">
+            <a:off x="7604080" y="6453143"/>
+            <a:ext cx="814903" cy="404857"/>
+          </a:xfrm>
+          <a:prstGeom prst="triangle">
+            <a:avLst/>
+          </a:prstGeom>
+          <a:solidFill>
+            <a:schemeClr val="accent1">
+              <a:alpha val="30000"/>
+            </a:schemeClr>
+          </a:solidFill>
+          <a:ln>
+            <a:noFill/>
+          </a:ln>
+        </p:spPr>
+        <p:style>
+          <a:lnRef idx="2">
+            <a:schemeClr val="accent1">
+              <a:shade val="50000"/>
+            </a:schemeClr>
+          </a:lnRef>
+          <a:fillRef idx="1">
+            <a:schemeClr val="accent1"/>
+          </a:fillRef>
+          <a:effectRef idx="0">
+            <a:schemeClr val="accent1"/>
+          </a:effectRef>
+          <a:fontRef idx="minor">
+            <a:schemeClr val="lt1"/>
+          </a:fontRef>
+        </p:style>
+        <p:txBody>
+          <a:bodyPr rtlCol="0" anchor="ctr"/>
+          <a:lstStyle/>
+          <a:p>
+            <a:pPr algn="ctr"/>
+            <a:endParaRPr lang="en-US"/>
+          </a:p>
+        </p:txBody>
+      </p:sp>
+      <p:graphicFrame>
+        <p:nvGraphicFramePr>
+          <p:cNvPr id="4" name="Table 3">
+            <a:extLst>
+              <a:ext uri="{FF2B5EF4-FFF2-40B4-BE49-F238E27FC236}">
+                <a16:creationId xmlns:a16="http://schemas.microsoft.com/office/drawing/2014/main" id="{54E841CD-BF13-59E3-71A3-B101EB2A7A50}"/>
+              </a:ext>
+            </a:extLst>
+          </p:cNvPr>
+          <p:cNvGraphicFramePr>
+            <a:graphicFrameLocks noGrp="1"/>
+          </p:cNvGraphicFramePr>
+          <p:nvPr>
+            <p:extLst>
+              <p:ext uri="{D42A27DB-BD31-4B8C-83A1-F6EECF244321}">
+                <p14:modId xmlns:p14="http://schemas.microsoft.com/office/powerpoint/2010/main" val="2379792690"/>
+              </p:ext>
+            </p:extLst>
+          </p:nvPr>
+        </p:nvGraphicFramePr>
+        <p:xfrm>
+          <a:off x="643467" y="699034"/>
+          <a:ext cx="10905067" cy="5459934"/>
+        </p:xfrm>
+        <a:graphic>
+          <a:graphicData uri="http://schemas.openxmlformats.org/drawingml/2006/table">
+            <a:tbl>
+              <a:tblPr firstRow="1" firstCol="1" bandRow="1">
+                <a:tableStyleId>{5C22544A-7EE6-4342-B048-85BDC9FD1C3A}</a:tableStyleId>
+              </a:tblPr>
+              <a:tblGrid>
+                <a:gridCol w="5450586">
+                  <a:extLst>
+                    <a:ext uri="{9D8B030D-6E8A-4147-A177-3AD203B41FA5}">
+                      <a16:colId xmlns:a16="http://schemas.microsoft.com/office/drawing/2014/main" val="2315822476"/>
+                    </a:ext>
+                  </a:extLst>
+                </a:gridCol>
+                <a:gridCol w="5454481">
+                  <a:extLst>
+                    <a:ext uri="{9D8B030D-6E8A-4147-A177-3AD203B41FA5}">
+                      <a16:colId xmlns:a16="http://schemas.microsoft.com/office/drawing/2014/main" val="1765520027"/>
+                    </a:ext>
+                  </a:extLst>
+                </a:gridCol>
+              </a:tblGrid>
+              <a:tr h="576058">
+                <a:tc>
+                  <a:txBody>
+                    <a:bodyPr/>
+                    <a:lstStyle/>
+                    <a:p>
+                      <a:pPr marL="0" marR="0">
+                        <a:lnSpc>
+                          <a:spcPct val="115000"/>
+                        </a:lnSpc>
+                        <a:spcAft>
+                          <a:spcPts val="800"/>
+                        </a:spcAft>
+                        <a:buNone/>
+                      </a:pPr>
+                      <a:r>
+                        <a:rPr lang="sr-Latn-RS" sz="2900" kern="100" dirty="0">
+                          <a:effectLst/>
+                        </a:rPr>
+                        <a:t>RDB (Snapshotting)</a:t>
+                      </a:r>
+                      <a:endParaRPr lang="en-US" sz="2900" kern="100" dirty="0">
+                        <a:effectLst/>
+                        <a:latin typeface="Aptos" panose="020B0004020202020204" pitchFamily="34" charset="0"/>
+                        <a:ea typeface="Aptos" panose="020B0004020202020204" pitchFamily="34" charset="0"/>
+                        <a:cs typeface="Times New Roman" panose="02020603050405020304" pitchFamily="18" charset="0"/>
+                      </a:endParaRPr>
+                    </a:p>
+                  </a:txBody>
+                  <a:tcPr marL="168238" marR="168238" marT="0" marB="0"/>
+                </a:tc>
+                <a:tc>
+                  <a:txBody>
+                    <a:bodyPr/>
+                    <a:lstStyle/>
+                    <a:p>
+                      <a:pPr marL="0" marR="0">
+                        <a:lnSpc>
+                          <a:spcPct val="115000"/>
+                        </a:lnSpc>
+                        <a:spcAft>
+                          <a:spcPts val="800"/>
+                        </a:spcAft>
+                        <a:buNone/>
+                      </a:pPr>
+                      <a:r>
+                        <a:rPr lang="sr-Latn-RS" sz="2900" kern="100">
+                          <a:effectLst/>
+                        </a:rPr>
+                        <a:t>AOF</a:t>
+                      </a:r>
+                      <a:endParaRPr lang="en-US" sz="2900" kern="100">
+                        <a:effectLst/>
+                        <a:latin typeface="Aptos" panose="020B0004020202020204" pitchFamily="34" charset="0"/>
+                        <a:ea typeface="Aptos" panose="020B0004020202020204" pitchFamily="34" charset="0"/>
+                        <a:cs typeface="Times New Roman" panose="02020603050405020304" pitchFamily="18" charset="0"/>
+                      </a:endParaRPr>
+                    </a:p>
+                  </a:txBody>
+                  <a:tcPr marL="168238" marR="168238" marT="0" marB="0"/>
+                </a:tc>
+                <a:extLst>
+                  <a:ext uri="{0D108BD9-81ED-4DB2-BD59-A6C34878D82A}">
+                    <a16:rowId xmlns:a16="http://schemas.microsoft.com/office/drawing/2014/main" val="3328059774"/>
+                  </a:ext>
+                </a:extLst>
+              </a:tr>
+              <a:tr h="576058">
+                <a:tc>
+                  <a:txBody>
+                    <a:bodyPr/>
+                    <a:lstStyle/>
+                    <a:p>
+                      <a:pPr marL="0" marR="0">
+                        <a:lnSpc>
+                          <a:spcPct val="115000"/>
+                        </a:lnSpc>
+                        <a:spcAft>
+                          <a:spcPts val="800"/>
+                        </a:spcAft>
+                        <a:buNone/>
+                      </a:pPr>
+                      <a:r>
+                        <a:rPr lang="sr-Latn-RS" sz="2900" kern="100">
+                          <a:effectLst/>
+                        </a:rPr>
+                        <a:t>Koristi manje resursa pri radu</a:t>
+                      </a:r>
+                      <a:endParaRPr lang="en-US" sz="2900" kern="100">
+                        <a:effectLst/>
+                        <a:latin typeface="Aptos" panose="020B0004020202020204" pitchFamily="34" charset="0"/>
+                        <a:ea typeface="Aptos" panose="020B0004020202020204" pitchFamily="34" charset="0"/>
+                        <a:cs typeface="Times New Roman" panose="02020603050405020304" pitchFamily="18" charset="0"/>
+                      </a:endParaRPr>
+                    </a:p>
+                  </a:txBody>
+                  <a:tcPr marL="168238" marR="168238" marT="0" marB="0"/>
+                </a:tc>
+                <a:tc>
+                  <a:txBody>
+                    <a:bodyPr/>
+                    <a:lstStyle/>
+                    <a:p>
+                      <a:pPr marL="0" marR="0">
+                        <a:lnSpc>
+                          <a:spcPct val="115000"/>
+                        </a:lnSpc>
+                        <a:spcAft>
+                          <a:spcPts val="800"/>
+                        </a:spcAft>
+                        <a:buNone/>
+                      </a:pPr>
+                      <a:r>
+                        <a:rPr lang="sr-Latn-RS" sz="2900" kern="100">
+                          <a:effectLst/>
+                        </a:rPr>
+                        <a:t>Koristi više resursa pri radu</a:t>
+                      </a:r>
+                      <a:endParaRPr lang="en-US" sz="2900" kern="100">
+                        <a:effectLst/>
+                        <a:latin typeface="Aptos" panose="020B0004020202020204" pitchFamily="34" charset="0"/>
+                        <a:ea typeface="Aptos" panose="020B0004020202020204" pitchFamily="34" charset="0"/>
+                        <a:cs typeface="Times New Roman" panose="02020603050405020304" pitchFamily="18" charset="0"/>
+                      </a:endParaRPr>
+                    </a:p>
+                  </a:txBody>
+                  <a:tcPr marL="168238" marR="168238" marT="0" marB="0"/>
+                </a:tc>
+                <a:extLst>
+                  <a:ext uri="{0D108BD9-81ED-4DB2-BD59-A6C34878D82A}">
+                    <a16:rowId xmlns:a16="http://schemas.microsoft.com/office/drawing/2014/main" val="638844113"/>
+                  </a:ext>
+                </a:extLst>
+              </a:tr>
+              <a:tr h="1091987">
+                <a:tc>
+                  <a:txBody>
+                    <a:bodyPr/>
+                    <a:lstStyle/>
+                    <a:p>
+                      <a:pPr marL="0" marR="0">
+                        <a:lnSpc>
+                          <a:spcPct val="115000"/>
+                        </a:lnSpc>
+                        <a:spcAft>
+                          <a:spcPts val="800"/>
+                        </a:spcAft>
+                        <a:buNone/>
+                      </a:pPr>
+                      <a:r>
+                        <a:rPr lang="sr-Latn-RS" sz="2900" kern="100">
+                          <a:effectLst/>
+                        </a:rPr>
+                        <a:t>Manje otporna na prekide u radu</a:t>
+                      </a:r>
+                      <a:endParaRPr lang="en-US" sz="2900" kern="100">
+                        <a:effectLst/>
+                        <a:latin typeface="Aptos" panose="020B0004020202020204" pitchFamily="34" charset="0"/>
+                        <a:ea typeface="Aptos" panose="020B0004020202020204" pitchFamily="34" charset="0"/>
+                        <a:cs typeface="Times New Roman" panose="02020603050405020304" pitchFamily="18" charset="0"/>
+                      </a:endParaRPr>
+                    </a:p>
+                  </a:txBody>
+                  <a:tcPr marL="168238" marR="168238" marT="0" marB="0"/>
+                </a:tc>
+                <a:tc>
+                  <a:txBody>
+                    <a:bodyPr/>
+                    <a:lstStyle/>
+                    <a:p>
+                      <a:pPr marL="0" marR="0">
+                        <a:lnSpc>
+                          <a:spcPct val="115000"/>
+                        </a:lnSpc>
+                        <a:spcAft>
+                          <a:spcPts val="800"/>
+                        </a:spcAft>
+                        <a:buNone/>
+                      </a:pPr>
+                      <a:r>
+                        <a:rPr lang="sr-Latn-RS" sz="2900" kern="100">
+                          <a:effectLst/>
+                        </a:rPr>
+                        <a:t>Više otporna na prekide</a:t>
+                      </a:r>
+                      <a:endParaRPr lang="en-US" sz="2900" kern="100">
+                        <a:effectLst/>
+                        <a:latin typeface="Aptos" panose="020B0004020202020204" pitchFamily="34" charset="0"/>
+                        <a:ea typeface="Aptos" panose="020B0004020202020204" pitchFamily="34" charset="0"/>
+                        <a:cs typeface="Times New Roman" panose="02020603050405020304" pitchFamily="18" charset="0"/>
+                      </a:endParaRPr>
+                    </a:p>
+                  </a:txBody>
+                  <a:tcPr marL="168238" marR="168238" marT="0" marB="0"/>
+                </a:tc>
+                <a:extLst>
+                  <a:ext uri="{0D108BD9-81ED-4DB2-BD59-A6C34878D82A}">
+                    <a16:rowId xmlns:a16="http://schemas.microsoft.com/office/drawing/2014/main" val="2189862190"/>
+                  </a:ext>
+                </a:extLst>
+              </a:tr>
+              <a:tr h="1091987">
+                <a:tc>
+                  <a:txBody>
+                    <a:bodyPr/>
+                    <a:lstStyle/>
+                    <a:p>
+                      <a:pPr marL="0" marR="0">
+                        <a:lnSpc>
+                          <a:spcPct val="115000"/>
+                        </a:lnSpc>
+                        <a:spcAft>
+                          <a:spcPts val="800"/>
+                        </a:spcAft>
+                        <a:buNone/>
+                      </a:pPr>
+                      <a:r>
+                        <a:rPr lang="sr-Latn-RS" sz="2900" kern="100">
+                          <a:effectLst/>
+                        </a:rPr>
+                        <a:t>Brži proces oporavka</a:t>
+                      </a:r>
+                      <a:endParaRPr lang="en-US" sz="2900" kern="100">
+                        <a:effectLst/>
+                        <a:latin typeface="Aptos" panose="020B0004020202020204" pitchFamily="34" charset="0"/>
+                        <a:ea typeface="Aptos" panose="020B0004020202020204" pitchFamily="34" charset="0"/>
+                        <a:cs typeface="Times New Roman" panose="02020603050405020304" pitchFamily="18" charset="0"/>
+                      </a:endParaRPr>
+                    </a:p>
+                  </a:txBody>
+                  <a:tcPr marL="168238" marR="168238" marT="0" marB="0"/>
+                </a:tc>
+                <a:tc>
+                  <a:txBody>
+                    <a:bodyPr/>
+                    <a:lstStyle/>
+                    <a:p>
+                      <a:pPr marL="0" marR="0">
+                        <a:lnSpc>
+                          <a:spcPct val="115000"/>
+                        </a:lnSpc>
+                        <a:spcAft>
+                          <a:spcPts val="800"/>
+                        </a:spcAft>
+                        <a:buNone/>
+                      </a:pPr>
+                      <a:r>
+                        <a:rPr lang="sr-Latn-RS" sz="2900" kern="100">
+                          <a:effectLst/>
+                        </a:rPr>
+                        <a:t>Sporije vreme oporavka zbog većih fajlova</a:t>
+                      </a:r>
+                      <a:endParaRPr lang="en-US" sz="2900" kern="100">
+                        <a:effectLst/>
+                        <a:latin typeface="Aptos" panose="020B0004020202020204" pitchFamily="34" charset="0"/>
+                        <a:ea typeface="Aptos" panose="020B0004020202020204" pitchFamily="34" charset="0"/>
+                        <a:cs typeface="Times New Roman" panose="02020603050405020304" pitchFamily="18" charset="0"/>
+                      </a:endParaRPr>
+                    </a:p>
+                  </a:txBody>
+                  <a:tcPr marL="168238" marR="168238" marT="0" marB="0"/>
+                </a:tc>
+                <a:extLst>
+                  <a:ext uri="{0D108BD9-81ED-4DB2-BD59-A6C34878D82A}">
+                    <a16:rowId xmlns:a16="http://schemas.microsoft.com/office/drawing/2014/main" val="4264969261"/>
+                  </a:ext>
+                </a:extLst>
+              </a:tr>
+              <a:tr h="2123844">
+                <a:tc>
+                  <a:txBody>
+                    <a:bodyPr/>
+                    <a:lstStyle/>
+                    <a:p>
+                      <a:pPr marL="0" marR="0">
+                        <a:lnSpc>
+                          <a:spcPct val="115000"/>
+                        </a:lnSpc>
+                        <a:spcAft>
+                          <a:spcPts val="800"/>
+                        </a:spcAft>
+                        <a:buNone/>
+                      </a:pPr>
+                      <a:r>
+                        <a:rPr lang="sr-Latn-RS" sz="2900" kern="100">
+                          <a:effectLst/>
+                        </a:rPr>
+                        <a:t>Zahteva manje resursa jer nema kompakcije, a I/O operacije se izvršavaju jednom na par sati.</a:t>
+                      </a:r>
+                      <a:endParaRPr lang="en-US" sz="2900" kern="100">
+                        <a:effectLst/>
+                        <a:latin typeface="Aptos" panose="020B0004020202020204" pitchFamily="34" charset="0"/>
+                        <a:ea typeface="Aptos" panose="020B0004020202020204" pitchFamily="34" charset="0"/>
+                        <a:cs typeface="Times New Roman" panose="02020603050405020304" pitchFamily="18" charset="0"/>
+                      </a:endParaRPr>
+                    </a:p>
+                  </a:txBody>
+                  <a:tcPr marL="168238" marR="168238" marT="0" marB="0"/>
+                </a:tc>
+                <a:tc>
+                  <a:txBody>
+                    <a:bodyPr/>
+                    <a:lstStyle/>
+                    <a:p>
+                      <a:pPr marL="0" marR="0">
+                        <a:lnSpc>
+                          <a:spcPct val="115000"/>
+                        </a:lnSpc>
+                        <a:spcAft>
+                          <a:spcPts val="800"/>
+                        </a:spcAft>
+                        <a:buNone/>
+                      </a:pPr>
+                      <a:r>
+                        <a:rPr lang="sr-Latn-RS" sz="2900" kern="100">
+                          <a:effectLst/>
+                        </a:rPr>
+                        <a:t>Zahteva više resursa, odnosno prostora na disku, jer fajlovi mogu dosta narasti i trebaju se kompaktovati.</a:t>
+                      </a:r>
+                      <a:endParaRPr lang="en-US" sz="2900" kern="100">
+                        <a:effectLst/>
+                        <a:latin typeface="Aptos" panose="020B0004020202020204" pitchFamily="34" charset="0"/>
+                        <a:ea typeface="Aptos" panose="020B0004020202020204" pitchFamily="34" charset="0"/>
+                        <a:cs typeface="Times New Roman" panose="02020603050405020304" pitchFamily="18" charset="0"/>
+                      </a:endParaRPr>
+                    </a:p>
+                  </a:txBody>
+                  <a:tcPr marL="168238" marR="168238" marT="0" marB="0"/>
+                </a:tc>
+                <a:extLst>
+                  <a:ext uri="{0D108BD9-81ED-4DB2-BD59-A6C34878D82A}">
+                    <a16:rowId xmlns:a16="http://schemas.microsoft.com/office/drawing/2014/main" val="2147240538"/>
+                  </a:ext>
+                </a:extLst>
+              </a:tr>
+            </a:tbl>
+          </a:graphicData>
+        </a:graphic>
+      </p:graphicFrame>
+    </p:spTree>
+    <p:extLst>
+      <p:ext uri="{BB962C8B-B14F-4D97-AF65-F5344CB8AC3E}">
+        <p14:creationId xmlns:p14="http://schemas.microsoft.com/office/powerpoint/2010/main" val="2532749635"/>
+      </p:ext>
+    </p:extLst>
+  </p:cSld>
+  <p:clrMapOvr>
+    <a:masterClrMapping/>
+  </p:clrMapOvr>
+</p:sld>
+</file>
+
+<file path=ppt/slides/slide13.xml><?xml version="1.0" encoding="utf-8"?>
+<p:sld xmlns:a="http://schemas.openxmlformats.org/drawingml/2006/main" xmlns:r="http://schemas.openxmlformats.org/officeDocument/2006/relationships" xmlns:p="http://schemas.openxmlformats.org/presentationml/2006/main">
+  <p:cSld>
+    <p:spTree>
+      <p:nvGrpSpPr>
+        <p:cNvPr id="1" name=""/>
+        <p:cNvGrpSpPr/>
+        <p:nvPr/>
+      </p:nvGrpSpPr>
+      <p:grpSpPr>
+        <a:xfrm>
+          <a:off x="0" y="0"/>
+          <a:ext cx="0" cy="0"/>
+          <a:chOff x="0" y="0"/>
+          <a:chExt cx="0" cy="0"/>
+        </a:xfrm>
+      </p:grpSpPr>
+      <p:sp>
+        <p:nvSpPr>
+          <p:cNvPr id="2" name="Title 1">
+            <a:extLst>
+              <a:ext uri="{FF2B5EF4-FFF2-40B4-BE49-F238E27FC236}">
+                <a16:creationId xmlns:a16="http://schemas.microsoft.com/office/drawing/2014/main" id="{23B3DBAC-B354-4C31-03BE-3245D48FB613}"/>
+              </a:ext>
+            </a:extLst>
+          </p:cNvPr>
+          <p:cNvSpPr>
+            <a:spLocks noGrp="1"/>
+          </p:cNvSpPr>
+          <p:nvPr>
+            <p:ph type="title"/>
+          </p:nvPr>
+        </p:nvSpPr>
+        <p:spPr/>
+        <p:txBody>
+          <a:bodyPr/>
+          <a:lstStyle/>
+          <a:p>
+            <a:r>
+              <a:rPr lang="sr-Latn-RS"/>
+              <a:t>MongoDB</a:t>
+            </a:r>
+            <a:endParaRPr lang="en-US"/>
+          </a:p>
+        </p:txBody>
+      </p:sp>
+      <p:sp>
+        <p:nvSpPr>
+          <p:cNvPr id="3" name="Content Placeholder 2">
+            <a:extLst>
+              <a:ext uri="{FF2B5EF4-FFF2-40B4-BE49-F238E27FC236}">
+                <a16:creationId xmlns:a16="http://schemas.microsoft.com/office/drawing/2014/main" id="{401D1182-BD9D-D869-BB0D-CFFED25F35C4}"/>
+              </a:ext>
+            </a:extLst>
+          </p:cNvPr>
+          <p:cNvSpPr>
+            <a:spLocks noGrp="1"/>
+          </p:cNvSpPr>
+          <p:nvPr>
+            <p:ph idx="1"/>
+          </p:nvPr>
+        </p:nvSpPr>
+        <p:spPr/>
+        <p:txBody>
+          <a:bodyPr/>
+          <a:lstStyle/>
+          <a:p>
+            <a:endParaRPr lang="en-US"/>
+          </a:p>
+        </p:txBody>
+      </p:sp>
+    </p:spTree>
+    <p:extLst>
+      <p:ext uri="{BB962C8B-B14F-4D97-AF65-F5344CB8AC3E}">
+        <p14:creationId xmlns:p14="http://schemas.microsoft.com/office/powerpoint/2010/main" val="4054804067"/>
+      </p:ext>
+    </p:extLst>
+  </p:cSld>
+  <p:clrMapOvr>
+    <a:masterClrMapping/>
+  </p:clrMapOvr>
+</p:sld>
+</file>
+
 <file path=ppt/slides/slide2.xml><?xml version="1.0" encoding="utf-8"?>
 <p:sld xmlns:a="http://schemas.openxmlformats.org/drawingml/2006/main" xmlns:r="http://schemas.openxmlformats.org/officeDocument/2006/relationships" xmlns:p="http://schemas.openxmlformats.org/presentationml/2006/main">
   <p:cSld>
@@ -3787,19 +5089,848 @@
             <p:ph idx="1"/>
           </p:nvPr>
         </p:nvSpPr>
-        <p:spPr/>
-        <p:txBody>
-          <a:bodyPr/>
-          <a:lstStyle/>
-          <a:p>
-            <a:endParaRPr lang="en-US"/>
-          </a:p>
-        </p:txBody>
-      </p:sp>
+        <p:spPr>
+          <a:xfrm>
+            <a:off x="738592" y="1493240"/>
+            <a:ext cx="6437382" cy="4904334"/>
+          </a:xfrm>
+        </p:spPr>
+        <p:txBody>
+          <a:bodyPr>
+            <a:normAutofit fontScale="77500" lnSpcReduction="20000"/>
+          </a:bodyPr>
+          <a:lstStyle/>
+          <a:p>
+            <a:r>
+              <a:rPr lang="sr-Latn-RS" dirty="0"/>
+              <a:t>Za razliku od ostalih key/value baza, Redis ima nekoliko različitih tipova podataka, poput skupa, sortiranog skupa, listi, heševa i ostalih.</a:t>
+            </a:r>
+          </a:p>
+          <a:p>
+            <a:r>
+              <a:rPr lang="sr-Latn-RS" dirty="0"/>
+              <a:t>Jedna Redis instanca može da podrži preko 100 hiljada operacija u sekundi na osrednjem hardveru.</a:t>
+            </a:r>
+          </a:p>
+          <a:p>
+            <a:r>
+              <a:rPr lang="sr-Latn-RS" dirty="0"/>
+              <a:t>Takođe je ekonomičan. Prazna instanca Redisa zauzima 3 MB, milion malih ključeva sa string vrednostima zauzima 85 MB memorije, dok milion složenijih heševa sa po 5 vrednosti pod jednim ključem zauzima 160 MB memorije.</a:t>
+            </a:r>
+          </a:p>
+          <a:p>
+            <a:r>
+              <a:rPr lang="sr-Latn-RS" dirty="0"/>
+              <a:t>Ima i sistem pub/sub za slanje velike količine podataka zainteresovanim stranama.</a:t>
+            </a:r>
+          </a:p>
+          <a:p>
+            <a:r>
+              <a:rPr lang="sr-Latn-RS" dirty="0"/>
+              <a:t>Ima i sistem perzistencije na disku, koji služi za očuvanje podataka i potencijalni oporavak od katastrofalnih okolnosti .</a:t>
+            </a:r>
+            <a:endParaRPr lang="en-US" dirty="0"/>
+          </a:p>
+        </p:txBody>
+      </p:sp>
+      <p:pic>
+        <p:nvPicPr>
+          <p:cNvPr id="5" name="Picture 4">
+            <a:extLst>
+              <a:ext uri="{FF2B5EF4-FFF2-40B4-BE49-F238E27FC236}">
+                <a16:creationId xmlns:a16="http://schemas.microsoft.com/office/drawing/2014/main" id="{D1EC144C-AA06-A46E-3434-A63C7A55DCC3}"/>
+              </a:ext>
+            </a:extLst>
+          </p:cNvPr>
+          <p:cNvPicPr>
+            <a:picLocks noChangeAspect="1"/>
+          </p:cNvPicPr>
+          <p:nvPr/>
+        </p:nvPicPr>
+        <p:blipFill>
+          <a:blip r:embed="rId2">
+            <a:extLst>
+              <a:ext uri="{28A0092B-C50C-407E-A947-70E740481C1C}">
+                <a14:useLocalDpi xmlns:a14="http://schemas.microsoft.com/office/drawing/2010/main" val="0"/>
+              </a:ext>
+            </a:extLst>
+          </a:blip>
+          <a:stretch>
+            <a:fillRect/>
+          </a:stretch>
+        </p:blipFill>
+        <p:spPr>
+          <a:xfrm>
+            <a:off x="7447983" y="659423"/>
+            <a:ext cx="4340984" cy="4418501"/>
+          </a:xfrm>
+          <a:prstGeom prst="rect">
+            <a:avLst/>
+          </a:prstGeom>
+        </p:spPr>
+      </p:pic>
     </p:spTree>
     <p:extLst>
       <p:ext uri="{BB962C8B-B14F-4D97-AF65-F5344CB8AC3E}">
         <p14:creationId xmlns:p14="http://schemas.microsoft.com/office/powerpoint/2010/main" val="3274405144"/>
+      </p:ext>
+    </p:extLst>
+  </p:cSld>
+  <p:clrMapOvr>
+    <a:masterClrMapping/>
+  </p:clrMapOvr>
+</p:sld>
+</file>
+
+<file path=ppt/slides/slide5.xml><?xml version="1.0" encoding="utf-8"?>
+<p:sld xmlns:a="http://schemas.openxmlformats.org/drawingml/2006/main" xmlns:r="http://schemas.openxmlformats.org/officeDocument/2006/relationships" xmlns:p="http://schemas.openxmlformats.org/presentationml/2006/main">
+  <p:cSld>
+    <p:spTree>
+      <p:nvGrpSpPr>
+        <p:cNvPr id="1" name=""/>
+        <p:cNvGrpSpPr/>
+        <p:nvPr/>
+      </p:nvGrpSpPr>
+      <p:grpSpPr>
+        <a:xfrm>
+          <a:off x="0" y="0"/>
+          <a:ext cx="0" cy="0"/>
+          <a:chOff x="0" y="0"/>
+          <a:chExt cx="0" cy="0"/>
+        </a:xfrm>
+      </p:grpSpPr>
+      <p:sp>
+        <p:nvSpPr>
+          <p:cNvPr id="2" name="Title 1">
+            <a:extLst>
+              <a:ext uri="{FF2B5EF4-FFF2-40B4-BE49-F238E27FC236}">
+                <a16:creationId xmlns:a16="http://schemas.microsoft.com/office/drawing/2014/main" id="{B165576C-28C9-EEA5-F6BE-5E16016D7791}"/>
+              </a:ext>
+            </a:extLst>
+          </p:cNvPr>
+          <p:cNvSpPr>
+            <a:spLocks noGrp="1"/>
+          </p:cNvSpPr>
+          <p:nvPr>
+            <p:ph type="title"/>
+          </p:nvPr>
+        </p:nvSpPr>
+        <p:spPr/>
+        <p:txBody>
+          <a:bodyPr/>
+          <a:lstStyle/>
+          <a:p>
+            <a:pPr algn="ctr"/>
+            <a:r>
+              <a:rPr lang="sr-Latn-RS" dirty="0"/>
+              <a:t>Neki tipovi podataka</a:t>
+            </a:r>
+            <a:endParaRPr lang="en-US" dirty="0"/>
+          </a:p>
+        </p:txBody>
+      </p:sp>
+      <p:pic>
+        <p:nvPicPr>
+          <p:cNvPr id="5" name="Content Placeholder 4">
+            <a:extLst>
+              <a:ext uri="{FF2B5EF4-FFF2-40B4-BE49-F238E27FC236}">
+                <a16:creationId xmlns:a16="http://schemas.microsoft.com/office/drawing/2014/main" id="{5129ED0A-2E26-3948-25AC-3000C98BE096}"/>
+              </a:ext>
+            </a:extLst>
+          </p:cNvPr>
+          <p:cNvPicPr>
+            <a:picLocks noGrp="1" noChangeAspect="1"/>
+          </p:cNvPicPr>
+          <p:nvPr>
+            <p:ph idx="1"/>
+          </p:nvPr>
+        </p:nvPicPr>
+        <p:blipFill>
+          <a:blip r:embed="rId2">
+            <a:extLst>
+              <a:ext uri="{28A0092B-C50C-407E-A947-70E740481C1C}">
+                <a14:useLocalDpi xmlns:a14="http://schemas.microsoft.com/office/drawing/2010/main" val="0"/>
+              </a:ext>
+            </a:extLst>
+          </a:blip>
+          <a:stretch>
+            <a:fillRect/>
+          </a:stretch>
+        </p:blipFill>
+        <p:spPr>
+          <a:xfrm>
+            <a:off x="6096000" y="2078516"/>
+            <a:ext cx="5148925" cy="2756904"/>
+          </a:xfrm>
+          <a:prstGeom prst="rect">
+            <a:avLst/>
+          </a:prstGeom>
+        </p:spPr>
+      </p:pic>
+      <p:pic>
+        <p:nvPicPr>
+          <p:cNvPr id="7" name="Picture 6">
+            <a:extLst>
+              <a:ext uri="{FF2B5EF4-FFF2-40B4-BE49-F238E27FC236}">
+                <a16:creationId xmlns:a16="http://schemas.microsoft.com/office/drawing/2014/main" id="{2F83EFDE-7675-E54D-2716-DE6370F2BF48}"/>
+              </a:ext>
+            </a:extLst>
+          </p:cNvPr>
+          <p:cNvPicPr>
+            <a:picLocks noChangeAspect="1"/>
+          </p:cNvPicPr>
+          <p:nvPr/>
+        </p:nvPicPr>
+        <p:blipFill>
+          <a:blip r:embed="rId3">
+            <a:extLst>
+              <a:ext uri="{28A0092B-C50C-407E-A947-70E740481C1C}">
+                <a14:useLocalDpi xmlns:a14="http://schemas.microsoft.com/office/drawing/2010/main" val="0"/>
+              </a:ext>
+            </a:extLst>
+          </a:blip>
+          <a:stretch>
+            <a:fillRect/>
+          </a:stretch>
+        </p:blipFill>
+        <p:spPr>
+          <a:xfrm>
+            <a:off x="585452" y="2149979"/>
+            <a:ext cx="4959010" cy="2558042"/>
+          </a:xfrm>
+          <a:prstGeom prst="rect">
+            <a:avLst/>
+          </a:prstGeom>
+        </p:spPr>
+      </p:pic>
+      <p:sp>
+        <p:nvSpPr>
+          <p:cNvPr id="8" name="TextBox 7">
+            <a:extLst>
+              <a:ext uri="{FF2B5EF4-FFF2-40B4-BE49-F238E27FC236}">
+                <a16:creationId xmlns:a16="http://schemas.microsoft.com/office/drawing/2014/main" id="{19131068-80AF-61BA-8548-2A5DC992388D}"/>
+              </a:ext>
+            </a:extLst>
+          </p:cNvPr>
+          <p:cNvSpPr txBox="1"/>
+          <p:nvPr/>
+        </p:nvSpPr>
+        <p:spPr>
+          <a:xfrm>
+            <a:off x="2256639" y="4982646"/>
+            <a:ext cx="1124219" cy="584775"/>
+          </a:xfrm>
+          <a:prstGeom prst="rect">
+            <a:avLst/>
+          </a:prstGeom>
+          <a:noFill/>
+        </p:spPr>
+        <p:txBody>
+          <a:bodyPr wrap="none" rtlCol="0">
+            <a:spAutoFit/>
+          </a:bodyPr>
+          <a:lstStyle/>
+          <a:p>
+            <a:r>
+              <a:rPr lang="sr-Latn-RS" sz="3200" b="1" dirty="0"/>
+              <a:t>Skup</a:t>
+            </a:r>
+            <a:endParaRPr lang="en-US" sz="3200" b="1" dirty="0"/>
+          </a:p>
+        </p:txBody>
+      </p:sp>
+      <p:sp>
+        <p:nvSpPr>
+          <p:cNvPr id="9" name="TextBox 8">
+            <a:extLst>
+              <a:ext uri="{FF2B5EF4-FFF2-40B4-BE49-F238E27FC236}">
+                <a16:creationId xmlns:a16="http://schemas.microsoft.com/office/drawing/2014/main" id="{97585BAC-0DF6-9575-1E85-465A2942401E}"/>
+              </a:ext>
+            </a:extLst>
+          </p:cNvPr>
+          <p:cNvSpPr txBox="1"/>
+          <p:nvPr/>
+        </p:nvSpPr>
+        <p:spPr>
+          <a:xfrm>
+            <a:off x="8349318" y="4930860"/>
+            <a:ext cx="923651" cy="584775"/>
+          </a:xfrm>
+          <a:prstGeom prst="rect">
+            <a:avLst/>
+          </a:prstGeom>
+          <a:noFill/>
+        </p:spPr>
+        <p:txBody>
+          <a:bodyPr wrap="none" rtlCol="0">
+            <a:spAutoFit/>
+          </a:bodyPr>
+          <a:lstStyle/>
+          <a:p>
+            <a:r>
+              <a:rPr lang="sr-Latn-RS" sz="3200" b="1" dirty="0"/>
+              <a:t>Heš</a:t>
+            </a:r>
+            <a:endParaRPr lang="en-US" sz="3200" b="1" dirty="0"/>
+          </a:p>
+        </p:txBody>
+      </p:sp>
+    </p:spTree>
+    <p:extLst>
+      <p:ext uri="{BB962C8B-B14F-4D97-AF65-F5344CB8AC3E}">
+        <p14:creationId xmlns:p14="http://schemas.microsoft.com/office/powerpoint/2010/main" val="1931738218"/>
+      </p:ext>
+    </p:extLst>
+  </p:cSld>
+  <p:clrMapOvr>
+    <a:masterClrMapping/>
+  </p:clrMapOvr>
+</p:sld>
+</file>
+
+<file path=ppt/slides/slide6.xml><?xml version="1.0" encoding="utf-8"?>
+<p:sld xmlns:a="http://schemas.openxmlformats.org/drawingml/2006/main" xmlns:r="http://schemas.openxmlformats.org/officeDocument/2006/relationships" xmlns:p="http://schemas.openxmlformats.org/presentationml/2006/main">
+  <p:cSld>
+    <p:spTree>
+      <p:nvGrpSpPr>
+        <p:cNvPr id="1" name=""/>
+        <p:cNvGrpSpPr/>
+        <p:nvPr/>
+      </p:nvGrpSpPr>
+      <p:grpSpPr>
+        <a:xfrm>
+          <a:off x="0" y="0"/>
+          <a:ext cx="0" cy="0"/>
+          <a:chOff x="0" y="0"/>
+          <a:chExt cx="0" cy="0"/>
+        </a:xfrm>
+      </p:grpSpPr>
+      <p:sp>
+        <p:nvSpPr>
+          <p:cNvPr id="2" name="Title 1">
+            <a:extLst>
+              <a:ext uri="{FF2B5EF4-FFF2-40B4-BE49-F238E27FC236}">
+                <a16:creationId xmlns:a16="http://schemas.microsoft.com/office/drawing/2014/main" id="{33DECC01-079E-9EBC-98F7-C2F418FCEB78}"/>
+              </a:ext>
+            </a:extLst>
+          </p:cNvPr>
+          <p:cNvSpPr>
+            <a:spLocks noGrp="1"/>
+          </p:cNvSpPr>
+          <p:nvPr>
+            <p:ph type="title"/>
+          </p:nvPr>
+        </p:nvSpPr>
+        <p:spPr>
+          <a:xfrm>
+            <a:off x="287775" y="87211"/>
+            <a:ext cx="7388152" cy="1325563"/>
+          </a:xfrm>
+        </p:spPr>
+        <p:txBody>
+          <a:bodyPr/>
+          <a:lstStyle/>
+          <a:p>
+            <a:r>
+              <a:rPr lang="sr-Latn-RS" dirty="0"/>
+              <a:t>Perzistencija kod Redisa</a:t>
+            </a:r>
+            <a:endParaRPr lang="en-US" dirty="0"/>
+          </a:p>
+        </p:txBody>
+      </p:sp>
+      <p:sp>
+        <p:nvSpPr>
+          <p:cNvPr id="3" name="Content Placeholder 2">
+            <a:extLst>
+              <a:ext uri="{FF2B5EF4-FFF2-40B4-BE49-F238E27FC236}">
+                <a16:creationId xmlns:a16="http://schemas.microsoft.com/office/drawing/2014/main" id="{5305D865-91A7-C354-C214-9A1BB8728230}"/>
+              </a:ext>
+            </a:extLst>
+          </p:cNvPr>
+          <p:cNvSpPr>
+            <a:spLocks noGrp="1"/>
+          </p:cNvSpPr>
+          <p:nvPr>
+            <p:ph idx="1"/>
+          </p:nvPr>
+        </p:nvSpPr>
+        <p:spPr>
+          <a:xfrm>
+            <a:off x="287776" y="1551963"/>
+            <a:ext cx="7388152" cy="4625000"/>
+          </a:xfrm>
+        </p:spPr>
+        <p:txBody>
+          <a:bodyPr>
+            <a:normAutofit fontScale="92500" lnSpcReduction="20000"/>
+          </a:bodyPr>
+          <a:lstStyle/>
+          <a:p>
+            <a:r>
+              <a:rPr lang="sr-Latn-RS" dirty="0"/>
+              <a:t>Za razliku od drugih in memory baza, Redis ima potpuno opcioni  sistem perzistencije na disk. On se sastoji iz dva principa:</a:t>
+            </a:r>
+          </a:p>
+          <a:p>
+            <a:pPr lvl="1"/>
+            <a:r>
+              <a:rPr lang="sr-Latn-RS" dirty="0"/>
+              <a:t>RDB (snapshotting)</a:t>
+            </a:r>
+          </a:p>
+          <a:p>
+            <a:pPr lvl="1"/>
+            <a:r>
+              <a:rPr lang="sr-Latn-RS" dirty="0"/>
+              <a:t>AOF (Append only file)</a:t>
+            </a:r>
+          </a:p>
+          <a:p>
+            <a:pPr lvl="1"/>
+            <a:r>
+              <a:rPr lang="sr-Latn-RS" dirty="0"/>
+              <a:t>Hibridni pristup</a:t>
+            </a:r>
+          </a:p>
+          <a:p>
+            <a:r>
+              <a:rPr lang="sr-Latn-RS" dirty="0"/>
+              <a:t>RDB (Redis Database) je veoma kompaktan fajl koji predstavlja stanje podataka u jednom trenutku. Ovi fajlovi su odlični za pravljenje bekapa čije stvaranje se može podesiti. Na primer RDB fajl se može čuvati na svakih sat vremena za poslednja 24 sata, kao i jedan dnevni snimak tokom 30 dana. Ukoliko dođe do nekog problema sa podacima, bekap omogućava povratak na ranije stabilno stanje.</a:t>
+            </a:r>
+          </a:p>
+          <a:p>
+            <a:endParaRPr lang="sr-Latn-RS" dirty="0"/>
+          </a:p>
+          <a:p>
+            <a:endParaRPr lang="en-US" dirty="0"/>
+          </a:p>
+        </p:txBody>
+      </p:sp>
+      <p:pic>
+        <p:nvPicPr>
+          <p:cNvPr id="5" name="Picture 4">
+            <a:extLst>
+              <a:ext uri="{FF2B5EF4-FFF2-40B4-BE49-F238E27FC236}">
+                <a16:creationId xmlns:a16="http://schemas.microsoft.com/office/drawing/2014/main" id="{ACCBB4AD-1F12-EAFC-A30C-EEFF2533600D}"/>
+              </a:ext>
+            </a:extLst>
+          </p:cNvPr>
+          <p:cNvPicPr>
+            <a:picLocks noChangeAspect="1"/>
+          </p:cNvPicPr>
+          <p:nvPr/>
+        </p:nvPicPr>
+        <p:blipFill>
+          <a:blip r:embed="rId2">
+            <a:extLst>
+              <a:ext uri="{28A0092B-C50C-407E-A947-70E740481C1C}">
+                <a14:useLocalDpi xmlns:a14="http://schemas.microsoft.com/office/drawing/2010/main" val="0"/>
+              </a:ext>
+            </a:extLst>
+          </a:blip>
+          <a:stretch>
+            <a:fillRect/>
+          </a:stretch>
+        </p:blipFill>
+        <p:spPr>
+          <a:xfrm>
+            <a:off x="7804310" y="749993"/>
+            <a:ext cx="4099915" cy="4435224"/>
+          </a:xfrm>
+          <a:prstGeom prst="rect">
+            <a:avLst/>
+          </a:prstGeom>
+        </p:spPr>
+      </p:pic>
+    </p:spTree>
+    <p:extLst>
+      <p:ext uri="{BB962C8B-B14F-4D97-AF65-F5344CB8AC3E}">
+        <p14:creationId xmlns:p14="http://schemas.microsoft.com/office/powerpoint/2010/main" val="40004163"/>
+      </p:ext>
+    </p:extLst>
+  </p:cSld>
+  <p:clrMapOvr>
+    <a:masterClrMapping/>
+  </p:clrMapOvr>
+</p:sld>
+</file>
+
+<file path=ppt/slides/slide7.xml><?xml version="1.0" encoding="utf-8"?>
+<p:sld xmlns:a="http://schemas.openxmlformats.org/drawingml/2006/main" xmlns:r="http://schemas.openxmlformats.org/officeDocument/2006/relationships" xmlns:p="http://schemas.openxmlformats.org/presentationml/2006/main">
+  <p:cSld>
+    <p:spTree>
+      <p:nvGrpSpPr>
+        <p:cNvPr id="1" name=""/>
+        <p:cNvGrpSpPr/>
+        <p:nvPr/>
+      </p:nvGrpSpPr>
+      <p:grpSpPr>
+        <a:xfrm>
+          <a:off x="0" y="0"/>
+          <a:ext cx="0" cy="0"/>
+          <a:chOff x="0" y="0"/>
+          <a:chExt cx="0" cy="0"/>
+        </a:xfrm>
+      </p:grpSpPr>
+      <p:sp>
+        <p:nvSpPr>
+          <p:cNvPr id="2" name="Title 1">
+            <a:extLst>
+              <a:ext uri="{FF2B5EF4-FFF2-40B4-BE49-F238E27FC236}">
+                <a16:creationId xmlns:a16="http://schemas.microsoft.com/office/drawing/2014/main" id="{62816859-6D93-A4FF-3648-427B55F3F3E6}"/>
+              </a:ext>
+            </a:extLst>
+          </p:cNvPr>
+          <p:cNvSpPr>
+            <a:spLocks noGrp="1"/>
+          </p:cNvSpPr>
+          <p:nvPr>
+            <p:ph type="title"/>
+          </p:nvPr>
+        </p:nvSpPr>
+        <p:spPr/>
+        <p:txBody>
+          <a:bodyPr/>
+          <a:lstStyle/>
+          <a:p>
+            <a:r>
+              <a:rPr lang="sr-Latn-RS" dirty="0"/>
+              <a:t>RDB - nastavak</a:t>
+            </a:r>
+            <a:endParaRPr lang="en-US" dirty="0"/>
+          </a:p>
+        </p:txBody>
+      </p:sp>
+      <p:sp>
+        <p:nvSpPr>
+          <p:cNvPr id="3" name="Content Placeholder 2">
+            <a:extLst>
+              <a:ext uri="{FF2B5EF4-FFF2-40B4-BE49-F238E27FC236}">
+                <a16:creationId xmlns:a16="http://schemas.microsoft.com/office/drawing/2014/main" id="{E3A9365C-21A2-CC11-DA9A-2BD0E28FBF2F}"/>
+              </a:ext>
+            </a:extLst>
+          </p:cNvPr>
+          <p:cNvSpPr>
+            <a:spLocks noGrp="1"/>
+          </p:cNvSpPr>
+          <p:nvPr>
+            <p:ph idx="1"/>
+          </p:nvPr>
+        </p:nvSpPr>
+        <p:spPr/>
+        <p:txBody>
+          <a:bodyPr>
+            <a:normAutofit lnSpcReduction="10000"/>
+          </a:bodyPr>
+          <a:lstStyle/>
+          <a:p>
+            <a:r>
+              <a:rPr lang="sr-Latn-RS" dirty="0"/>
+              <a:t>Snapshot-ovi se podrazumevano čuvaju u binarnom fajlu po imenu dump.rdb. Postoje različiti vidovi konfiguracije, od kojih je jedan na primer upis promena u datasetu svakih N sekundi ukoliko je došlo do M promena, ili se mogu ručno pozvati komande SAVE ili BGSAVE.</a:t>
+            </a:r>
+          </a:p>
+          <a:p>
+            <a:r>
+              <a:rPr lang="sr-Latn-RS" dirty="0"/>
+              <a:t>Neki osnovni tok izvršavanja jednog snapshot-a je sledeći:</a:t>
+            </a:r>
+            <a:endParaRPr lang="en-US" dirty="0"/>
+          </a:p>
+          <a:p>
+            <a:pPr lvl="1"/>
+            <a:r>
+              <a:rPr lang="sr-Latn-RS" dirty="0"/>
+              <a:t>Redis izvrši fork() i napravi dečiji proces.</a:t>
+            </a:r>
+            <a:endParaRPr lang="en-US" dirty="0"/>
+          </a:p>
+          <a:p>
+            <a:pPr lvl="1"/>
+            <a:r>
+              <a:rPr lang="sr-Latn-RS" dirty="0"/>
+              <a:t>Dete upisuje dataset u privremeni RDB fajl.</a:t>
+            </a:r>
+            <a:endParaRPr lang="en-US" dirty="0"/>
+          </a:p>
+          <a:p>
+            <a:pPr lvl="1"/>
+            <a:r>
+              <a:rPr lang="sr-Latn-RS" dirty="0"/>
+              <a:t>Kada dete okonča upis, zameni originalni RDB sa svojim.</a:t>
+            </a:r>
+            <a:endParaRPr lang="en-US" dirty="0"/>
+          </a:p>
+          <a:p>
+            <a:pPr lvl="1"/>
+            <a:r>
+              <a:rPr lang="sr-Latn-RS" dirty="0"/>
+              <a:t>Prilikom konfiguracije se učestalost snapshot-a može podesiti na 1 sat, na 6 sati i na 12 sati.</a:t>
+            </a:r>
+          </a:p>
+          <a:p>
+            <a:endParaRPr lang="en-US" dirty="0"/>
+          </a:p>
+        </p:txBody>
+      </p:sp>
+    </p:spTree>
+    <p:extLst>
+      <p:ext uri="{BB962C8B-B14F-4D97-AF65-F5344CB8AC3E}">
+        <p14:creationId xmlns:p14="http://schemas.microsoft.com/office/powerpoint/2010/main" val="3802024823"/>
+      </p:ext>
+    </p:extLst>
+  </p:cSld>
+  <p:clrMapOvr>
+    <a:masterClrMapping/>
+  </p:clrMapOvr>
+</p:sld>
+</file>
+
+<file path=ppt/slides/slide8.xml><?xml version="1.0" encoding="utf-8"?>
+<p:sld xmlns:a="http://schemas.openxmlformats.org/drawingml/2006/main" xmlns:r="http://schemas.openxmlformats.org/officeDocument/2006/relationships" xmlns:p="http://schemas.openxmlformats.org/presentationml/2006/main">
+  <p:cSld>
+    <p:spTree>
+      <p:nvGrpSpPr>
+        <p:cNvPr id="1" name=""/>
+        <p:cNvGrpSpPr/>
+        <p:nvPr/>
+      </p:nvGrpSpPr>
+      <p:grpSpPr>
+        <a:xfrm>
+          <a:off x="0" y="0"/>
+          <a:ext cx="0" cy="0"/>
+          <a:chOff x="0" y="0"/>
+          <a:chExt cx="0" cy="0"/>
+        </a:xfrm>
+      </p:grpSpPr>
+      <p:sp>
+        <p:nvSpPr>
+          <p:cNvPr id="2" name="Title 1">
+            <a:extLst>
+              <a:ext uri="{FF2B5EF4-FFF2-40B4-BE49-F238E27FC236}">
+                <a16:creationId xmlns:a16="http://schemas.microsoft.com/office/drawing/2014/main" id="{9D3579CF-BEF5-724E-53B8-B72F3404E3C3}"/>
+              </a:ext>
+            </a:extLst>
+          </p:cNvPr>
+          <p:cNvSpPr>
+            <a:spLocks noGrp="1"/>
+          </p:cNvSpPr>
+          <p:nvPr>
+            <p:ph type="title"/>
+          </p:nvPr>
+        </p:nvSpPr>
+        <p:spPr/>
+        <p:txBody>
+          <a:bodyPr/>
+          <a:lstStyle/>
+          <a:p>
+            <a:r>
+              <a:rPr lang="sr-Latn-RS" dirty="0"/>
+              <a:t>RDB - prednosti</a:t>
+            </a:r>
+            <a:endParaRPr lang="en-US" dirty="0"/>
+          </a:p>
+        </p:txBody>
+      </p:sp>
+      <p:sp>
+        <p:nvSpPr>
+          <p:cNvPr id="3" name="Content Placeholder 2">
+            <a:extLst>
+              <a:ext uri="{FF2B5EF4-FFF2-40B4-BE49-F238E27FC236}">
+                <a16:creationId xmlns:a16="http://schemas.microsoft.com/office/drawing/2014/main" id="{85E5B1BD-F597-EAE9-B215-6C722D22A6E8}"/>
+              </a:ext>
+            </a:extLst>
+          </p:cNvPr>
+          <p:cNvSpPr>
+            <a:spLocks noGrp="1"/>
+          </p:cNvSpPr>
+          <p:nvPr>
+            <p:ph idx="1"/>
+          </p:nvPr>
+        </p:nvSpPr>
+        <p:spPr/>
+        <p:txBody>
+          <a:bodyPr>
+            <a:normAutofit lnSpcReduction="10000"/>
+          </a:bodyPr>
+          <a:lstStyle/>
+          <a:p>
+            <a:r>
+              <a:rPr lang="sr-Latn-RS" dirty="0"/>
+              <a:t>Prednost korišćenja RDB-a je što je  je jako koristan za oporavak jer je sve spakovano u jedan mali fajl koji se može prebaciti na neki drugi server, koji potencijalno može biti i na cloud-u, gde se podaci rekonstruišu.</a:t>
+            </a:r>
+          </a:p>
+          <a:p>
+            <a:r>
+              <a:rPr lang="sr-Latn-RS" dirty="0"/>
+              <a:t>RDB takođe čuva performanse Redis-a, jer glavni proces praktično ne radi težak posao, već samo fork-uje pomoćni proces koji odradi snimanje podataka.</a:t>
+            </a:r>
+          </a:p>
+          <a:p>
+            <a:r>
+              <a:rPr lang="sr-Latn-RS" dirty="0"/>
+              <a:t>Glavni proces ne mora da se bavi upisom na disk ili sličnim stvarima. Još jedna prednost je što se Redis brže pokreće sa velikim količinama podataka kada koristi RDB u poređenju sa AOF-om</a:t>
+            </a:r>
+            <a:endParaRPr lang="en-US" dirty="0"/>
+          </a:p>
+        </p:txBody>
+      </p:sp>
+    </p:spTree>
+    <p:extLst>
+      <p:ext uri="{BB962C8B-B14F-4D97-AF65-F5344CB8AC3E}">
+        <p14:creationId xmlns:p14="http://schemas.microsoft.com/office/powerpoint/2010/main" val="2081081031"/>
+      </p:ext>
+    </p:extLst>
+  </p:cSld>
+  <p:clrMapOvr>
+    <a:masterClrMapping/>
+  </p:clrMapOvr>
+</p:sld>
+</file>
+
+<file path=ppt/slides/slide9.xml><?xml version="1.0" encoding="utf-8"?>
+<p:sld xmlns:a="http://schemas.openxmlformats.org/drawingml/2006/main" xmlns:r="http://schemas.openxmlformats.org/officeDocument/2006/relationships" xmlns:p="http://schemas.openxmlformats.org/presentationml/2006/main">
+  <p:cSld>
+    <p:spTree>
+      <p:nvGrpSpPr>
+        <p:cNvPr id="1" name=""/>
+        <p:cNvGrpSpPr/>
+        <p:nvPr/>
+      </p:nvGrpSpPr>
+      <p:grpSpPr>
+        <a:xfrm>
+          <a:off x="0" y="0"/>
+          <a:ext cx="0" cy="0"/>
+          <a:chOff x="0" y="0"/>
+          <a:chExt cx="0" cy="0"/>
+        </a:xfrm>
+      </p:grpSpPr>
+      <p:sp>
+        <p:nvSpPr>
+          <p:cNvPr id="2" name="Title 1">
+            <a:extLst>
+              <a:ext uri="{FF2B5EF4-FFF2-40B4-BE49-F238E27FC236}">
+                <a16:creationId xmlns:a16="http://schemas.microsoft.com/office/drawing/2014/main" id="{7EF3822A-6031-0C9C-3325-9FF810C44A2D}"/>
+              </a:ext>
+            </a:extLst>
+          </p:cNvPr>
+          <p:cNvSpPr>
+            <a:spLocks noGrp="1"/>
+          </p:cNvSpPr>
+          <p:nvPr>
+            <p:ph type="title"/>
+          </p:nvPr>
+        </p:nvSpPr>
+        <p:spPr>
+          <a:xfrm>
+            <a:off x="838200" y="365125"/>
+            <a:ext cx="3423407" cy="1325563"/>
+          </a:xfrm>
+        </p:spPr>
+        <p:txBody>
+          <a:bodyPr/>
+          <a:lstStyle/>
+          <a:p>
+            <a:r>
+              <a:rPr lang="sr-Latn-RS" dirty="0"/>
+              <a:t>RDB - Mane</a:t>
+            </a:r>
+            <a:endParaRPr lang="en-US" dirty="0"/>
+          </a:p>
+        </p:txBody>
+      </p:sp>
+      <p:pic>
+        <p:nvPicPr>
+          <p:cNvPr id="5" name="Content Placeholder 4">
+            <a:extLst>
+              <a:ext uri="{FF2B5EF4-FFF2-40B4-BE49-F238E27FC236}">
+                <a16:creationId xmlns:a16="http://schemas.microsoft.com/office/drawing/2014/main" id="{F5BFC777-74A7-E049-44AC-00C3B7C25BD6}"/>
+              </a:ext>
+            </a:extLst>
+          </p:cNvPr>
+          <p:cNvPicPr>
+            <a:picLocks noGrp="1" noChangeAspect="1"/>
+          </p:cNvPicPr>
+          <p:nvPr>
+            <p:ph idx="1"/>
+          </p:nvPr>
+        </p:nvPicPr>
+        <p:blipFill>
+          <a:blip r:embed="rId2">
+            <a:extLst>
+              <a:ext uri="{28A0092B-C50C-407E-A947-70E740481C1C}">
+                <a14:useLocalDpi xmlns:a14="http://schemas.microsoft.com/office/drawing/2010/main" val="0"/>
+              </a:ext>
+            </a:extLst>
+          </a:blip>
+          <a:stretch>
+            <a:fillRect/>
+          </a:stretch>
+        </p:blipFill>
+        <p:spPr>
+          <a:xfrm>
+            <a:off x="7692704" y="874565"/>
+            <a:ext cx="4030211" cy="5453400"/>
+          </a:xfrm>
+          <a:prstGeom prst="rect">
+            <a:avLst/>
+          </a:prstGeom>
+        </p:spPr>
+      </p:pic>
+      <p:sp>
+        <p:nvSpPr>
+          <p:cNvPr id="6" name="TextBox 5">
+            <a:extLst>
+              <a:ext uri="{FF2B5EF4-FFF2-40B4-BE49-F238E27FC236}">
+                <a16:creationId xmlns:a16="http://schemas.microsoft.com/office/drawing/2014/main" id="{03AE5511-EC24-7A36-3726-983D1B65C0C5}"/>
+              </a:ext>
+            </a:extLst>
+          </p:cNvPr>
+          <p:cNvSpPr txBox="1"/>
+          <p:nvPr/>
+        </p:nvSpPr>
+        <p:spPr>
+          <a:xfrm>
+            <a:off x="469085" y="1862327"/>
+            <a:ext cx="6975511" cy="3477875"/>
+          </a:xfrm>
+          <a:prstGeom prst="rect">
+            <a:avLst/>
+          </a:prstGeom>
+          <a:noFill/>
+        </p:spPr>
+        <p:txBody>
+          <a:bodyPr wrap="square" rtlCol="0">
+            <a:spAutoFit/>
+          </a:bodyPr>
+          <a:lstStyle/>
+          <a:p>
+            <a:pPr marL="285750" indent="-285750">
+              <a:buFont typeface="Arial" panose="020B0604020202020204" pitchFamily="34" charset="0"/>
+              <a:buChar char="•"/>
+            </a:pPr>
+            <a:r>
+              <a:rPr lang="sr-Latn-RS" sz="2000" dirty="0"/>
+              <a:t>Nije dobar ukoliko se treba sprečiti gubitak podataka u slučaju prekida rada Redisa, na primer prilikom gubitka struje. Dok se RDB snapshot može podesiti na svakih nekoliko intervala, problem može nastati ako Redis obustavi rad u periodu između ta dva vremenska intervala, pa se može desiti gubitak podataka koji su tada nastali.</a:t>
+            </a:r>
+          </a:p>
+          <a:p>
+            <a:pPr marL="285750" indent="-285750">
+              <a:buFont typeface="Arial" panose="020B0604020202020204" pitchFamily="34" charset="0"/>
+              <a:buChar char="•"/>
+            </a:pPr>
+            <a:r>
+              <a:rPr lang="sr-Latn-RS" sz="2000" dirty="0"/>
+              <a:t>Druga mana je upotreba fork-a kako bi se napravio proces. Ukoliko je količina podataka velika, a procesor nema preteranih performansi, fork može uzeti puno vremena, a čak i sam Redis može da odloži ili prekine isporuku podataka klijentima.</a:t>
+            </a:r>
+            <a:endParaRPr lang="en-US" sz="2000" dirty="0"/>
+          </a:p>
+        </p:txBody>
+      </p:sp>
+    </p:spTree>
+    <p:extLst>
+      <p:ext uri="{BB962C8B-B14F-4D97-AF65-F5344CB8AC3E}">
+        <p14:creationId xmlns:p14="http://schemas.microsoft.com/office/powerpoint/2010/main" val="2699517750"/>
       </p:ext>
     </p:extLst>
   </p:cSld>

--- a/Redis i Mongo.pptx
+++ b/Redis i Mongo.pptx
@@ -4648,10 +4648,10 @@
           <a:lstStyle/>
           <a:p>
             <a:r>
-              <a:rPr lang="sr-Latn-RS"/>
+              <a:rPr lang="sr-Latn-RS" dirty="0"/>
               <a:t>MongoDB</a:t>
             </a:r>
-            <a:endParaRPr lang="en-US"/>
+            <a:endParaRPr lang="en-US" dirty="0"/>
           </a:p>
         </p:txBody>
       </p:sp>
@@ -4671,15 +4671,110 @@
             <p:ph idx="1"/>
           </p:nvPr>
         </p:nvSpPr>
-        <p:spPr/>
-        <p:txBody>
-          <a:bodyPr/>
-          <a:lstStyle/>
-          <a:p>
-            <a:endParaRPr lang="en-US"/>
-          </a:p>
-        </p:txBody>
-      </p:sp>
+        <p:spPr>
+          <a:xfrm>
+            <a:off x="838200" y="1825625"/>
+            <a:ext cx="6745448" cy="4351338"/>
+          </a:xfrm>
+        </p:spPr>
+        <p:txBody>
+          <a:bodyPr>
+            <a:normAutofit fontScale="92500" lnSpcReduction="10000"/>
+          </a:bodyPr>
+          <a:lstStyle/>
+          <a:p>
+            <a:r>
+              <a:rPr lang="sr-Latn-RS" dirty="0"/>
+              <a:t>Takođe NoSQL baza podataka koja spada u dokument baze.</a:t>
+            </a:r>
+          </a:p>
+          <a:p>
+            <a:r>
+              <a:rPr lang="sr-Latn-RS" dirty="0"/>
+              <a:t>Podaci se čuvaju nalik na JSON objekte, ali u binarnom formatu koji se naziva BSON (Binary JSON).</a:t>
+            </a:r>
+          </a:p>
+          <a:p>
+            <a:r>
+              <a:rPr lang="sr-Latn-RS" dirty="0"/>
+              <a:t>Podaci su zamišljeni da imitiraju one iz aplikacija, tako da se idealno jednim upitom oni mogu izvući. Podržava i nestruktuirane i polustruktuirane podatke, a ima i sopstveni bogat jezik za upite. Može da skalira horizontalno uz sharding, a postoji i njihovo cloud rešenje po imenu Atlas.</a:t>
+            </a:r>
+            <a:endParaRPr lang="en-US" dirty="0"/>
+          </a:p>
+        </p:txBody>
+      </p:sp>
+      <p:pic>
+        <p:nvPicPr>
+          <p:cNvPr id="7" name="Picture 6">
+            <a:extLst>
+              <a:ext uri="{FF2B5EF4-FFF2-40B4-BE49-F238E27FC236}">
+                <a16:creationId xmlns:a16="http://schemas.microsoft.com/office/drawing/2014/main" id="{517E3590-C026-850A-5DCA-D6C1D25FCD76}"/>
+              </a:ext>
+            </a:extLst>
+          </p:cNvPr>
+          <p:cNvPicPr>
+            <a:picLocks noChangeAspect="1"/>
+          </p:cNvPicPr>
+          <p:nvPr/>
+        </p:nvPicPr>
+        <p:blipFill>
+          <a:blip r:embed="rId2">
+            <a:extLst>
+              <a:ext uri="{28A0092B-C50C-407E-A947-70E740481C1C}">
+                <a14:useLocalDpi xmlns:a14="http://schemas.microsoft.com/office/drawing/2010/main" val="0"/>
+              </a:ext>
+            </a:extLst>
+          </a:blip>
+          <a:stretch>
+            <a:fillRect/>
+          </a:stretch>
+        </p:blipFill>
+        <p:spPr>
+          <a:xfrm>
+            <a:off x="8064665" y="195380"/>
+            <a:ext cx="3467450" cy="875892"/>
+          </a:xfrm>
+          <a:prstGeom prst="rect">
+            <a:avLst/>
+          </a:prstGeom>
+        </p:spPr>
+      </p:pic>
+      <p:pic>
+        <p:nvPicPr>
+          <p:cNvPr id="9" name="Picture 8">
+            <a:extLst>
+              <a:ext uri="{FF2B5EF4-FFF2-40B4-BE49-F238E27FC236}">
+                <a16:creationId xmlns:a16="http://schemas.microsoft.com/office/drawing/2014/main" id="{5DCA6C46-F35C-3454-01D6-D9AAF9F3D3C8}"/>
+              </a:ext>
+            </a:extLst>
+          </p:cNvPr>
+          <p:cNvPicPr>
+            <a:picLocks noChangeAspect="1"/>
+          </p:cNvPicPr>
+          <p:nvPr/>
+        </p:nvPicPr>
+        <p:blipFill>
+          <a:blip r:embed="rId3">
+            <a:extLst>
+              <a:ext uri="{28A0092B-C50C-407E-A947-70E740481C1C}">
+                <a14:useLocalDpi xmlns:a14="http://schemas.microsoft.com/office/drawing/2010/main" val="0"/>
+              </a:ext>
+            </a:extLst>
+          </a:blip>
+          <a:stretch>
+            <a:fillRect/>
+          </a:stretch>
+        </p:blipFill>
+        <p:spPr>
+          <a:xfrm>
+            <a:off x="8077016" y="1300754"/>
+            <a:ext cx="3633413" cy="5112927"/>
+          </a:xfrm>
+          <a:prstGeom prst="rect">
+            <a:avLst/>
+          </a:prstGeom>
+        </p:spPr>
+      </p:pic>
     </p:spTree>
     <p:extLst>
       <p:ext uri="{BB962C8B-B14F-4D97-AF65-F5344CB8AC3E}">

--- a/Redis i Mongo.pptx
+++ b/Redis i Mongo.pptx
@@ -18,6 +18,9 @@
     <p:sldId id="266" r:id="rId12"/>
     <p:sldId id="267" r:id="rId13"/>
     <p:sldId id="268" r:id="rId14"/>
+    <p:sldId id="269" r:id="rId15"/>
+    <p:sldId id="270" r:id="rId16"/>
+    <p:sldId id="271" r:id="rId17"/>
   </p:sldIdLst>
   <p:sldSz cx="12192000" cy="6858000"/>
   <p:notesSz cx="6858000" cy="9144000"/>
@@ -271,7 +274,7 @@
           <a:p>
             <a:fld id="{8E65598A-7B5B-4941-B56A-61930BC81C02}" type="datetimeFigureOut">
               <a:rPr lang="en-US" smtClean="0"/>
-              <a:t>12-May-26</a:t>
+              <a:t>19-May-26</a:t>
             </a:fld>
             <a:endParaRPr lang="en-US"/>
           </a:p>
@@ -469,7 +472,7 @@
           <a:p>
             <a:fld id="{8E65598A-7B5B-4941-B56A-61930BC81C02}" type="datetimeFigureOut">
               <a:rPr lang="en-US" smtClean="0"/>
-              <a:t>12-May-26</a:t>
+              <a:t>19-May-26</a:t>
             </a:fld>
             <a:endParaRPr lang="en-US"/>
           </a:p>
@@ -677,7 +680,7 @@
           <a:p>
             <a:fld id="{8E65598A-7B5B-4941-B56A-61930BC81C02}" type="datetimeFigureOut">
               <a:rPr lang="en-US" smtClean="0"/>
-              <a:t>12-May-26</a:t>
+              <a:t>19-May-26</a:t>
             </a:fld>
             <a:endParaRPr lang="en-US"/>
           </a:p>
@@ -875,7 +878,7 @@
           <a:p>
             <a:fld id="{8E65598A-7B5B-4941-B56A-61930BC81C02}" type="datetimeFigureOut">
               <a:rPr lang="en-US" smtClean="0"/>
-              <a:t>12-May-26</a:t>
+              <a:t>19-May-26</a:t>
             </a:fld>
             <a:endParaRPr lang="en-US"/>
           </a:p>
@@ -1150,7 +1153,7 @@
           <a:p>
             <a:fld id="{8E65598A-7B5B-4941-B56A-61930BC81C02}" type="datetimeFigureOut">
               <a:rPr lang="en-US" smtClean="0"/>
-              <a:t>12-May-26</a:t>
+              <a:t>19-May-26</a:t>
             </a:fld>
             <a:endParaRPr lang="en-US"/>
           </a:p>
@@ -1415,7 +1418,7 @@
           <a:p>
             <a:fld id="{8E65598A-7B5B-4941-B56A-61930BC81C02}" type="datetimeFigureOut">
               <a:rPr lang="en-US" smtClean="0"/>
-              <a:t>12-May-26</a:t>
+              <a:t>19-May-26</a:t>
             </a:fld>
             <a:endParaRPr lang="en-US"/>
           </a:p>
@@ -1827,7 +1830,7 @@
           <a:p>
             <a:fld id="{8E65598A-7B5B-4941-B56A-61930BC81C02}" type="datetimeFigureOut">
               <a:rPr lang="en-US" smtClean="0"/>
-              <a:t>12-May-26</a:t>
+              <a:t>19-May-26</a:t>
             </a:fld>
             <a:endParaRPr lang="en-US"/>
           </a:p>
@@ -1968,7 +1971,7 @@
           <a:p>
             <a:fld id="{8E65598A-7B5B-4941-B56A-61930BC81C02}" type="datetimeFigureOut">
               <a:rPr lang="en-US" smtClean="0"/>
-              <a:t>12-May-26</a:t>
+              <a:t>19-May-26</a:t>
             </a:fld>
             <a:endParaRPr lang="en-US"/>
           </a:p>
@@ -2081,7 +2084,7 @@
           <a:p>
             <a:fld id="{8E65598A-7B5B-4941-B56A-61930BC81C02}" type="datetimeFigureOut">
               <a:rPr lang="en-US" smtClean="0"/>
-              <a:t>12-May-26</a:t>
+              <a:t>19-May-26</a:t>
             </a:fld>
             <a:endParaRPr lang="en-US"/>
           </a:p>
@@ -2392,7 +2395,7 @@
           <a:p>
             <a:fld id="{8E65598A-7B5B-4941-B56A-61930BC81C02}" type="datetimeFigureOut">
               <a:rPr lang="en-US" smtClean="0"/>
-              <a:t>12-May-26</a:t>
+              <a:t>19-May-26</a:t>
             </a:fld>
             <a:endParaRPr lang="en-US"/>
           </a:p>
@@ -2680,7 +2683,7 @@
           <a:p>
             <a:fld id="{8E65598A-7B5B-4941-B56A-61930BC81C02}" type="datetimeFigureOut">
               <a:rPr lang="en-US" smtClean="0"/>
-              <a:t>12-May-26</a:t>
+              <a:t>19-May-26</a:t>
             </a:fld>
             <a:endParaRPr lang="en-US"/>
           </a:p>
@@ -2921,7 +2924,7 @@
           <a:p>
             <a:fld id="{8E65598A-7B5B-4941-B56A-61930BC81C02}" type="datetimeFigureOut">
               <a:rPr lang="en-US" smtClean="0"/>
-              <a:t>12-May-26</a:t>
+              <a:t>19-May-26</a:t>
             </a:fld>
             <a:endParaRPr lang="en-US"/>
           </a:p>
@@ -4788,6 +4791,339 @@
 </p:sld>
 </file>
 
+<file path=ppt/slides/slide14.xml><?xml version="1.0" encoding="utf-8"?>
+<p:sld xmlns:a="http://schemas.openxmlformats.org/drawingml/2006/main" xmlns:r="http://schemas.openxmlformats.org/officeDocument/2006/relationships" xmlns:p="http://schemas.openxmlformats.org/presentationml/2006/main">
+  <p:cSld>
+    <p:spTree>
+      <p:nvGrpSpPr>
+        <p:cNvPr id="1" name=""/>
+        <p:cNvGrpSpPr/>
+        <p:nvPr/>
+      </p:nvGrpSpPr>
+      <p:grpSpPr>
+        <a:xfrm>
+          <a:off x="0" y="0"/>
+          <a:ext cx="0" cy="0"/>
+          <a:chOff x="0" y="0"/>
+          <a:chExt cx="0" cy="0"/>
+        </a:xfrm>
+      </p:grpSpPr>
+      <p:sp>
+        <p:nvSpPr>
+          <p:cNvPr id="2" name="Title 1">
+            <a:extLst>
+              <a:ext uri="{FF2B5EF4-FFF2-40B4-BE49-F238E27FC236}">
+                <a16:creationId xmlns:a16="http://schemas.microsoft.com/office/drawing/2014/main" id="{CA3676A8-406D-585C-1F1E-9893EE3CAC20}"/>
+              </a:ext>
+            </a:extLst>
+          </p:cNvPr>
+          <p:cNvSpPr>
+            <a:spLocks noGrp="1"/>
+          </p:cNvSpPr>
+          <p:nvPr>
+            <p:ph type="title"/>
+          </p:nvPr>
+        </p:nvSpPr>
+        <p:spPr/>
+        <p:txBody>
+          <a:bodyPr/>
+          <a:lstStyle/>
+          <a:p>
+            <a:r>
+              <a:rPr lang="sr-Latn-RS" dirty="0"/>
+              <a:t>Dokumenti</a:t>
+            </a:r>
+            <a:endParaRPr lang="en-US" dirty="0"/>
+          </a:p>
+        </p:txBody>
+      </p:sp>
+      <p:sp>
+        <p:nvSpPr>
+          <p:cNvPr id="3" name="Content Placeholder 2">
+            <a:extLst>
+              <a:ext uri="{FF2B5EF4-FFF2-40B4-BE49-F238E27FC236}">
+                <a16:creationId xmlns:a16="http://schemas.microsoft.com/office/drawing/2014/main" id="{B3F1AD2F-5E96-7676-1C29-35FC13E0481A}"/>
+              </a:ext>
+            </a:extLst>
+          </p:cNvPr>
+          <p:cNvSpPr>
+            <a:spLocks noGrp="1"/>
+          </p:cNvSpPr>
+          <p:nvPr>
+            <p:ph idx="1"/>
+          </p:nvPr>
+        </p:nvSpPr>
+        <p:spPr/>
+        <p:txBody>
+          <a:bodyPr>
+            <a:normAutofit fontScale="55000" lnSpcReduction="20000"/>
+          </a:bodyPr>
+          <a:lstStyle/>
+          <a:p>
+            <a:r>
+              <a:rPr lang="sr-Latn-RS" dirty="0"/>
+              <a:t>Dokument je osnovna jedinica čuvanja podataka kod Monga. Slični su JSON objektima i sastoji se od parova polje-vrednost, pri čemu vrednost može biti bilo šta, od broja, stringa, listi do drugog dokumenta. Ideja iza ove strukture je da podaci liče što više moguće na ono što se koristi u aplikacijama kako bi se smanjo broj ili potreba za spojevima koji se koriste u relacionim bazama podataka. Podaci se čuvaju u BSON formatu, koji je binarna predstava JSON-a koji pored toga ima više tipova podataka od njega.</a:t>
+            </a:r>
+          </a:p>
+          <a:p>
+            <a:r>
+              <a:rPr lang="sr-Latn-RS" dirty="0"/>
+              <a:t>Svaki objekat u ovoj bazi mora imati _id polje, a ovde se može videti da je u polju </a:t>
+            </a:r>
+            <a:r>
+              <a:rPr lang="sr-Latn-RS" i="1" dirty="0"/>
+              <a:t>name</a:t>
+            </a:r>
+            <a:r>
+              <a:rPr lang="sr-Latn-RS" dirty="0"/>
+              <a:t> kao vrednost ubačen drugi dokument sa imenom i prezimenom. Postoje i neka ograničenja u imenovanju tih polja: [13]</a:t>
+            </a:r>
+            <a:endParaRPr lang="en-US" dirty="0"/>
+          </a:p>
+          <a:p>
+            <a:pPr lvl="0"/>
+            <a:r>
+              <a:rPr lang="sr-Latn-RS" dirty="0"/>
+              <a:t>_id mora biti jedinstven i nepromenljiv unutar kolekcije pošto služi kao primarni ključ. Može biti bilo šta osim niza i regex-a. Ako ovo polje sadrži potpolja unutar sebe, nijedno od njih ne sme imati $.</a:t>
+            </a:r>
+            <a:endParaRPr lang="en-US" dirty="0"/>
+          </a:p>
+          <a:p>
+            <a:pPr lvl="0"/>
+            <a:r>
+              <a:rPr lang="sr-Latn-RS" dirty="0"/>
+              <a:t>Imena polja ne smeju sadržati karakter </a:t>
+            </a:r>
+            <a:r>
+              <a:rPr lang="sr-Latn-RS" i="1" dirty="0"/>
+              <a:t>null</a:t>
+            </a:r>
+            <a:r>
+              <a:rPr lang="sr-Latn-RS" dirty="0"/>
+              <a:t>.</a:t>
+            </a:r>
+            <a:endParaRPr lang="en-US" dirty="0"/>
+          </a:p>
+          <a:p>
+            <a:pPr lvl="0"/>
+            <a:r>
+              <a:rPr lang="sr-Latn-RS" dirty="0"/>
+              <a:t>U okviru jednog dokumenta ne sme biti polja sa istim nazivima, ali su sumboli . i $ dozvoljeni.</a:t>
+            </a:r>
+            <a:endParaRPr lang="en-US" dirty="0"/>
+          </a:p>
+          <a:p>
+            <a:r>
+              <a:rPr lang="sr-Latn-RS" dirty="0"/>
+              <a:t>Kako bi se pristupilo nekim ugnježdenim vrednostima, Mongo koristi „.“, slično kao što to koriste moderni programski jezici.</a:t>
+            </a:r>
+            <a:endParaRPr lang="en-US" dirty="0"/>
+          </a:p>
+          <a:p>
+            <a:r>
+              <a:rPr lang="sr-Latn-RS" dirty="0"/>
+              <a:t>Maksimalna veličina jednog dokumenta je 16 mebibitova (nije megabajt, označava se sa MiB umesto MB), odnosno oko 16.7 MB. Takođe za razliku od JSON-a, polja u BSON-u su sortirana po engleskom alfabetu rastuće, nalik na rečnik. Jedna od posledica ovoga je što poređenje dva dokumenta sa naizgled istim atributima daje različite rezultate, pa na primer </a:t>
+            </a:r>
+            <a:r>
+              <a:rPr lang="en-US" dirty="0"/>
+              <a:t>{a: 1, b: 1} </a:t>
+            </a:r>
+            <a:r>
+              <a:rPr lang="sr-Latn-RS" dirty="0"/>
+              <a:t>nije isto sa </a:t>
+            </a:r>
+            <a:r>
+              <a:rPr lang="en-US" dirty="0"/>
+              <a:t>{b: 1, a: 1}.</a:t>
+            </a:r>
+          </a:p>
+        </p:txBody>
+      </p:sp>
+    </p:spTree>
+    <p:extLst>
+      <p:ext uri="{BB962C8B-B14F-4D97-AF65-F5344CB8AC3E}">
+        <p14:creationId xmlns:p14="http://schemas.microsoft.com/office/powerpoint/2010/main" val="1647704003"/>
+      </p:ext>
+    </p:extLst>
+  </p:cSld>
+  <p:clrMapOvr>
+    <a:masterClrMapping/>
+  </p:clrMapOvr>
+</p:sld>
+</file>
+
+<file path=ppt/slides/slide15.xml><?xml version="1.0" encoding="utf-8"?>
+<p:sld xmlns:a="http://schemas.openxmlformats.org/drawingml/2006/main" xmlns:r="http://schemas.openxmlformats.org/officeDocument/2006/relationships" xmlns:p="http://schemas.openxmlformats.org/presentationml/2006/main">
+  <p:cSld>
+    <p:spTree>
+      <p:nvGrpSpPr>
+        <p:cNvPr id="1" name=""/>
+        <p:cNvGrpSpPr/>
+        <p:nvPr/>
+      </p:nvGrpSpPr>
+      <p:grpSpPr>
+        <a:xfrm>
+          <a:off x="0" y="0"/>
+          <a:ext cx="0" cy="0"/>
+          <a:chOff x="0" y="0"/>
+          <a:chExt cx="0" cy="0"/>
+        </a:xfrm>
+      </p:grpSpPr>
+      <p:sp>
+        <p:nvSpPr>
+          <p:cNvPr id="2" name="Title 1">
+            <a:extLst>
+              <a:ext uri="{FF2B5EF4-FFF2-40B4-BE49-F238E27FC236}">
+                <a16:creationId xmlns:a16="http://schemas.microsoft.com/office/drawing/2014/main" id="{BA6D1CB9-E27D-A51D-1B87-6B0DE33D6C45}"/>
+              </a:ext>
+            </a:extLst>
+          </p:cNvPr>
+          <p:cNvSpPr>
+            <a:spLocks noGrp="1"/>
+          </p:cNvSpPr>
+          <p:nvPr>
+            <p:ph type="title"/>
+          </p:nvPr>
+        </p:nvSpPr>
+        <p:spPr/>
+        <p:txBody>
+          <a:bodyPr/>
+          <a:lstStyle/>
+          <a:p>
+            <a:r>
+              <a:rPr lang="sr-Latn-RS" dirty="0"/>
+              <a:t>Aggregation pipeline</a:t>
+            </a:r>
+            <a:endParaRPr lang="en-US" dirty="0"/>
+          </a:p>
+        </p:txBody>
+      </p:sp>
+      <p:sp>
+        <p:nvSpPr>
+          <p:cNvPr id="3" name="Content Placeholder 2">
+            <a:extLst>
+              <a:ext uri="{FF2B5EF4-FFF2-40B4-BE49-F238E27FC236}">
+                <a16:creationId xmlns:a16="http://schemas.microsoft.com/office/drawing/2014/main" id="{935588F9-B560-1271-F6BE-774D07ADF972}"/>
+              </a:ext>
+            </a:extLst>
+          </p:cNvPr>
+          <p:cNvSpPr>
+            <a:spLocks noGrp="1"/>
+          </p:cNvSpPr>
+          <p:nvPr>
+            <p:ph idx="1"/>
+          </p:nvPr>
+        </p:nvSpPr>
+        <p:spPr/>
+        <p:txBody>
+          <a:bodyPr/>
+          <a:lstStyle/>
+          <a:p>
+            <a:r>
+              <a:rPr lang="sr-Latn-RS" dirty="0"/>
+              <a:t>MongoDB ima i svoje operatore čijom kombinacijom se može napraviti takozvani aggregation pipeline koji se koristi za izmenu i modifikaciju podataka. Pipeline se sastoji iz nekoliko koraka ili faza obrade, i svaka koristi neki operator koji počinje sa $, poput $filter, $project, $merge i ostali. Jedan od primera ovakvih pipeline-ova u NodeJS-u je i sledeć</a:t>
+            </a:r>
+            <a:endParaRPr lang="en-US" dirty="0"/>
+          </a:p>
+        </p:txBody>
+      </p:sp>
+    </p:spTree>
+    <p:extLst>
+      <p:ext uri="{BB962C8B-B14F-4D97-AF65-F5344CB8AC3E}">
+        <p14:creationId xmlns:p14="http://schemas.microsoft.com/office/powerpoint/2010/main" val="2368548664"/>
+      </p:ext>
+    </p:extLst>
+  </p:cSld>
+  <p:clrMapOvr>
+    <a:masterClrMapping/>
+  </p:clrMapOvr>
+</p:sld>
+</file>
+
+<file path=ppt/slides/slide16.xml><?xml version="1.0" encoding="utf-8"?>
+<p:sld xmlns:a="http://schemas.openxmlformats.org/drawingml/2006/main" xmlns:r="http://schemas.openxmlformats.org/officeDocument/2006/relationships" xmlns:p="http://schemas.openxmlformats.org/presentationml/2006/main">
+  <p:cSld>
+    <p:spTree>
+      <p:nvGrpSpPr>
+        <p:cNvPr id="1" name=""/>
+        <p:cNvGrpSpPr/>
+        <p:nvPr/>
+      </p:nvGrpSpPr>
+      <p:grpSpPr>
+        <a:xfrm>
+          <a:off x="0" y="0"/>
+          <a:ext cx="0" cy="0"/>
+          <a:chOff x="0" y="0"/>
+          <a:chExt cx="0" cy="0"/>
+        </a:xfrm>
+      </p:grpSpPr>
+      <p:sp>
+        <p:nvSpPr>
+          <p:cNvPr id="2" name="Title 1">
+            <a:extLst>
+              <a:ext uri="{FF2B5EF4-FFF2-40B4-BE49-F238E27FC236}">
+                <a16:creationId xmlns:a16="http://schemas.microsoft.com/office/drawing/2014/main" id="{9121FCB7-03E8-E577-311B-2B513D681B41}"/>
+              </a:ext>
+            </a:extLst>
+          </p:cNvPr>
+          <p:cNvSpPr>
+            <a:spLocks noGrp="1"/>
+          </p:cNvSpPr>
+          <p:nvPr>
+            <p:ph type="title"/>
+          </p:nvPr>
+        </p:nvSpPr>
+        <p:spPr/>
+        <p:txBody>
+          <a:bodyPr/>
+          <a:lstStyle/>
+          <a:p>
+            <a:r>
+              <a:rPr lang="sr-Latn-RS"/>
+              <a:t>Performanse</a:t>
+            </a:r>
+            <a:endParaRPr lang="en-US"/>
+          </a:p>
+        </p:txBody>
+      </p:sp>
+      <p:sp>
+        <p:nvSpPr>
+          <p:cNvPr id="3" name="Content Placeholder 2">
+            <a:extLst>
+              <a:ext uri="{FF2B5EF4-FFF2-40B4-BE49-F238E27FC236}">
+                <a16:creationId xmlns:a16="http://schemas.microsoft.com/office/drawing/2014/main" id="{B5B935DC-A6EB-C1D2-6837-2ABB05AF37C1}"/>
+              </a:ext>
+            </a:extLst>
+          </p:cNvPr>
+          <p:cNvSpPr>
+            <a:spLocks noGrp="1"/>
+          </p:cNvSpPr>
+          <p:nvPr>
+            <p:ph idx="1"/>
+          </p:nvPr>
+        </p:nvSpPr>
+        <p:spPr/>
+        <p:txBody>
+          <a:bodyPr/>
+          <a:lstStyle/>
+          <a:p>
+            <a:endParaRPr lang="en-US"/>
+          </a:p>
+        </p:txBody>
+      </p:sp>
+    </p:spTree>
+    <p:extLst>
+      <p:ext uri="{BB962C8B-B14F-4D97-AF65-F5344CB8AC3E}">
+        <p14:creationId xmlns:p14="http://schemas.microsoft.com/office/powerpoint/2010/main" val="893872459"/>
+      </p:ext>
+    </p:extLst>
+  </p:cSld>
+  <p:clrMapOvr>
+    <a:masterClrMapping/>
+  </p:clrMapOvr>
+</p:sld>
+</file>
+
 <file path=ppt/slides/slide2.xml><?xml version="1.0" encoding="utf-8"?>
 <p:sld xmlns:a="http://schemas.openxmlformats.org/drawingml/2006/main" xmlns:r="http://schemas.openxmlformats.org/officeDocument/2006/relationships" xmlns:p="http://schemas.openxmlformats.org/presentationml/2006/main">
   <p:cSld>

--- a/Redis i Mongo.pptx
+++ b/Redis i Mongo.pptx
@@ -17,10 +17,12 @@
     <p:sldId id="265" r:id="rId11"/>
     <p:sldId id="266" r:id="rId12"/>
     <p:sldId id="267" r:id="rId13"/>
-    <p:sldId id="268" r:id="rId14"/>
-    <p:sldId id="269" r:id="rId15"/>
-    <p:sldId id="270" r:id="rId16"/>
-    <p:sldId id="271" r:id="rId17"/>
+    <p:sldId id="272" r:id="rId14"/>
+    <p:sldId id="268" r:id="rId15"/>
+    <p:sldId id="269" r:id="rId16"/>
+    <p:sldId id="270" r:id="rId17"/>
+    <p:sldId id="271" r:id="rId18"/>
+    <p:sldId id="273" r:id="rId19"/>
   </p:sldIdLst>
   <p:sldSz cx="12192000" cy="6858000"/>
   <p:notesSz cx="6858000" cy="9144000"/>
@@ -4634,6 +4636,152 @@
           <p:cNvPr id="2" name="Title 1">
             <a:extLst>
               <a:ext uri="{FF2B5EF4-FFF2-40B4-BE49-F238E27FC236}">
+                <a16:creationId xmlns:a16="http://schemas.microsoft.com/office/drawing/2014/main" id="{536E7537-D048-A0A0-68EA-5E34F34FA6EF}"/>
+              </a:ext>
+            </a:extLst>
+          </p:cNvPr>
+          <p:cNvSpPr>
+            <a:spLocks noGrp="1"/>
+          </p:cNvSpPr>
+          <p:nvPr>
+            <p:ph type="title"/>
+          </p:nvPr>
+        </p:nvSpPr>
+        <p:spPr>
+          <a:xfrm>
+            <a:off x="838200" y="92563"/>
+            <a:ext cx="10515600" cy="1325563"/>
+          </a:xfrm>
+        </p:spPr>
+        <p:txBody>
+          <a:bodyPr/>
+          <a:lstStyle/>
+          <a:p>
+            <a:r>
+              <a:rPr lang="sr-Latn-RS" dirty="0"/>
+              <a:t>Performanse</a:t>
+            </a:r>
+            <a:endParaRPr lang="en-US" dirty="0"/>
+          </a:p>
+        </p:txBody>
+      </p:sp>
+      <p:sp>
+        <p:nvSpPr>
+          <p:cNvPr id="3" name="Content Placeholder 2">
+            <a:extLst>
+              <a:ext uri="{FF2B5EF4-FFF2-40B4-BE49-F238E27FC236}">
+                <a16:creationId xmlns:a16="http://schemas.microsoft.com/office/drawing/2014/main" id="{C3B123F9-ABDB-37BA-115A-46D86814159D}"/>
+              </a:ext>
+            </a:extLst>
+          </p:cNvPr>
+          <p:cNvSpPr>
+            <a:spLocks noGrp="1"/>
+          </p:cNvSpPr>
+          <p:nvPr>
+            <p:ph idx="1"/>
+          </p:nvPr>
+        </p:nvSpPr>
+        <p:spPr>
+          <a:xfrm>
+            <a:off x="838200" y="1418125"/>
+            <a:ext cx="10515600" cy="5347311"/>
+          </a:xfrm>
+        </p:spPr>
+        <p:txBody>
+          <a:bodyPr>
+            <a:normAutofit fontScale="77500" lnSpcReduction="20000"/>
+          </a:bodyPr>
+          <a:lstStyle/>
+          <a:p>
+            <a:r>
+              <a:rPr lang="sr-Latn-RS" dirty="0"/>
+              <a:t>Zbog event loop-a Redis je uspeo da ostvari oko 50.000 upita u sekundi na kvalitetnom hardveru uz preko 60.000 istovremenih konekcija. </a:t>
+            </a:r>
+            <a:endParaRPr lang="en-US" dirty="0"/>
+          </a:p>
+          <a:p>
+            <a:r>
+              <a:rPr lang="sr-Latn-RS" dirty="0"/>
+              <a:t>U 2021. je nastala i objava na internetu o tome kako se mogu poboljšati performanse Redisa. Za male objekte veličine ispod 10 kB stvari poput brzine RAM memorije i njene protočnosti ne utiču previše na performanse Redisa, dok za objekte preko 10 kB to može biti primetno, ali ne ključno.</a:t>
+            </a:r>
+          </a:p>
+          <a:p>
+            <a:r>
+              <a:rPr lang="sr-Latn-RS" dirty="0"/>
+              <a:t>Kako bi se Redis ubrzao ne smatra se previše efikasnim da se kupi neka brza RAM memorija ili ostali memorijski elementi. Glavni razlog koji utiče na performanse je forkovanje koje je nephodno za perzistenciju podataka na disk, naravno ukoliko se to koristi. Ovde može doći i do velike latencije ukoliko je uključena opcija THP, odnosno Transparent Huge Pages na Linux kernelu. THP su blokovi memorije veličine od 2 MB i 1 GB. Problem kod performansi koji ovde može nastati je sledeći:</a:t>
+            </a:r>
+            <a:endParaRPr lang="en-US" dirty="0"/>
+          </a:p>
+          <a:p>
+            <a:pPr lvl="1"/>
+            <a:r>
+              <a:rPr lang="sr-Latn-RS" dirty="0"/>
+              <a:t>Nakon pozivanja fork() postoje dva procesa sa ogromnim memorijskim stranicama.</a:t>
+            </a:r>
+            <a:endParaRPr lang="en-US" dirty="0"/>
+          </a:p>
+          <a:p>
+            <a:pPr lvl="1"/>
+            <a:r>
+              <a:rPr lang="sr-Latn-RS" dirty="0"/>
+              <a:t>U instanci koja ima mnogo zahteva par komandi u event loop-u mogu da zauzmu dostra stranica, pa se skoro cela procesna memorija može prepisati na disk.</a:t>
+            </a:r>
+            <a:endParaRPr lang="en-US" dirty="0"/>
+          </a:p>
+          <a:p>
+            <a:pPr lvl="1"/>
+            <a:r>
+              <a:rPr lang="sr-Latn-RS" dirty="0"/>
+              <a:t>Posledica ovoga je velika latencija usled velikog zauzeća memorije.</a:t>
+            </a:r>
+          </a:p>
+          <a:p>
+            <a:r>
+              <a:rPr lang="sr-Latn-RS" dirty="0"/>
+              <a:t>Takođe, podrazumevano ponašanje Redisa je da zauzima svu raspoloživu serversku memoriju. Preporučuje se da se oko 75-85% memorije dodeli Redisu i da on ne radi na deljenom hostingu, odnosno shared hostingu, već na posvećenom i zasebnom (dedicated).</a:t>
+            </a:r>
+            <a:endParaRPr lang="en-US" dirty="0"/>
+          </a:p>
+          <a:p>
+            <a:endParaRPr lang="en-US" dirty="0"/>
+          </a:p>
+        </p:txBody>
+      </p:sp>
+    </p:spTree>
+    <p:extLst>
+      <p:ext uri="{BB962C8B-B14F-4D97-AF65-F5344CB8AC3E}">
+        <p14:creationId xmlns:p14="http://schemas.microsoft.com/office/powerpoint/2010/main" val="546431598"/>
+      </p:ext>
+    </p:extLst>
+  </p:cSld>
+  <p:clrMapOvr>
+    <a:masterClrMapping/>
+  </p:clrMapOvr>
+</p:sld>
+</file>
+
+<file path=ppt/slides/slide14.xml><?xml version="1.0" encoding="utf-8"?>
+<p:sld xmlns:a="http://schemas.openxmlformats.org/drawingml/2006/main" xmlns:r="http://schemas.openxmlformats.org/officeDocument/2006/relationships" xmlns:p="http://schemas.openxmlformats.org/presentationml/2006/main">
+  <p:cSld>
+    <p:spTree>
+      <p:nvGrpSpPr>
+        <p:cNvPr id="1" name=""/>
+        <p:cNvGrpSpPr/>
+        <p:nvPr/>
+      </p:nvGrpSpPr>
+      <p:grpSpPr>
+        <a:xfrm>
+          <a:off x="0" y="0"/>
+          <a:ext cx="0" cy="0"/>
+          <a:chOff x="0" y="0"/>
+          <a:chExt cx="0" cy="0"/>
+        </a:xfrm>
+      </p:grpSpPr>
+      <p:sp>
+        <p:nvSpPr>
+          <p:cNvPr id="2" name="Title 1">
+            <a:extLst>
+              <a:ext uri="{FF2B5EF4-FFF2-40B4-BE49-F238E27FC236}">
                 <a16:creationId xmlns:a16="http://schemas.microsoft.com/office/drawing/2014/main" id="{23B3DBAC-B354-4C31-03BE-3245D48FB613}"/>
               </a:ext>
             </a:extLst>
@@ -4791,167 +4939,6 @@
 </p:sld>
 </file>
 
-<file path=ppt/slides/slide14.xml><?xml version="1.0" encoding="utf-8"?>
-<p:sld xmlns:a="http://schemas.openxmlformats.org/drawingml/2006/main" xmlns:r="http://schemas.openxmlformats.org/officeDocument/2006/relationships" xmlns:p="http://schemas.openxmlformats.org/presentationml/2006/main">
-  <p:cSld>
-    <p:spTree>
-      <p:nvGrpSpPr>
-        <p:cNvPr id="1" name=""/>
-        <p:cNvGrpSpPr/>
-        <p:nvPr/>
-      </p:nvGrpSpPr>
-      <p:grpSpPr>
-        <a:xfrm>
-          <a:off x="0" y="0"/>
-          <a:ext cx="0" cy="0"/>
-          <a:chOff x="0" y="0"/>
-          <a:chExt cx="0" cy="0"/>
-        </a:xfrm>
-      </p:grpSpPr>
-      <p:sp>
-        <p:nvSpPr>
-          <p:cNvPr id="2" name="Title 1">
-            <a:extLst>
-              <a:ext uri="{FF2B5EF4-FFF2-40B4-BE49-F238E27FC236}">
-                <a16:creationId xmlns:a16="http://schemas.microsoft.com/office/drawing/2014/main" id="{CA3676A8-406D-585C-1F1E-9893EE3CAC20}"/>
-              </a:ext>
-            </a:extLst>
-          </p:cNvPr>
-          <p:cNvSpPr>
-            <a:spLocks noGrp="1"/>
-          </p:cNvSpPr>
-          <p:nvPr>
-            <p:ph type="title"/>
-          </p:nvPr>
-        </p:nvSpPr>
-        <p:spPr/>
-        <p:txBody>
-          <a:bodyPr/>
-          <a:lstStyle/>
-          <a:p>
-            <a:r>
-              <a:rPr lang="sr-Latn-RS" dirty="0"/>
-              <a:t>Dokumenti</a:t>
-            </a:r>
-            <a:endParaRPr lang="en-US" dirty="0"/>
-          </a:p>
-        </p:txBody>
-      </p:sp>
-      <p:sp>
-        <p:nvSpPr>
-          <p:cNvPr id="3" name="Content Placeholder 2">
-            <a:extLst>
-              <a:ext uri="{FF2B5EF4-FFF2-40B4-BE49-F238E27FC236}">
-                <a16:creationId xmlns:a16="http://schemas.microsoft.com/office/drawing/2014/main" id="{B3F1AD2F-5E96-7676-1C29-35FC13E0481A}"/>
-              </a:ext>
-            </a:extLst>
-          </p:cNvPr>
-          <p:cNvSpPr>
-            <a:spLocks noGrp="1"/>
-          </p:cNvSpPr>
-          <p:nvPr>
-            <p:ph idx="1"/>
-          </p:nvPr>
-        </p:nvSpPr>
-        <p:spPr/>
-        <p:txBody>
-          <a:bodyPr>
-            <a:normAutofit fontScale="55000" lnSpcReduction="20000"/>
-          </a:bodyPr>
-          <a:lstStyle/>
-          <a:p>
-            <a:r>
-              <a:rPr lang="sr-Latn-RS" dirty="0"/>
-              <a:t>Dokument je osnovna jedinica čuvanja podataka kod Monga. Slični su JSON objektima i sastoji se od parova polje-vrednost, pri čemu vrednost može biti bilo šta, od broja, stringa, listi do drugog dokumenta. Ideja iza ove strukture je da podaci liče što više moguće na ono što se koristi u aplikacijama kako bi se smanjo broj ili potreba za spojevima koji se koriste u relacionim bazama podataka. Podaci se čuvaju u BSON formatu, koji je binarna predstava JSON-a koji pored toga ima više tipova podataka od njega.</a:t>
-            </a:r>
-          </a:p>
-          <a:p>
-            <a:r>
-              <a:rPr lang="sr-Latn-RS" dirty="0"/>
-              <a:t>Svaki objekat u ovoj bazi mora imati _id polje, a ovde se može videti da je u polju </a:t>
-            </a:r>
-            <a:r>
-              <a:rPr lang="sr-Latn-RS" i="1" dirty="0"/>
-              <a:t>name</a:t>
-            </a:r>
-            <a:r>
-              <a:rPr lang="sr-Latn-RS" dirty="0"/>
-              <a:t> kao vrednost ubačen drugi dokument sa imenom i prezimenom. Postoje i neka ograničenja u imenovanju tih polja: [13]</a:t>
-            </a:r>
-            <a:endParaRPr lang="en-US" dirty="0"/>
-          </a:p>
-          <a:p>
-            <a:pPr lvl="0"/>
-            <a:r>
-              <a:rPr lang="sr-Latn-RS" dirty="0"/>
-              <a:t>_id mora biti jedinstven i nepromenljiv unutar kolekcije pošto služi kao primarni ključ. Može biti bilo šta osim niza i regex-a. Ako ovo polje sadrži potpolja unutar sebe, nijedno od njih ne sme imati $.</a:t>
-            </a:r>
-            <a:endParaRPr lang="en-US" dirty="0"/>
-          </a:p>
-          <a:p>
-            <a:pPr lvl="0"/>
-            <a:r>
-              <a:rPr lang="sr-Latn-RS" dirty="0"/>
-              <a:t>Imena polja ne smeju sadržati karakter </a:t>
-            </a:r>
-            <a:r>
-              <a:rPr lang="sr-Latn-RS" i="1" dirty="0"/>
-              <a:t>null</a:t>
-            </a:r>
-            <a:r>
-              <a:rPr lang="sr-Latn-RS" dirty="0"/>
-              <a:t>.</a:t>
-            </a:r>
-            <a:endParaRPr lang="en-US" dirty="0"/>
-          </a:p>
-          <a:p>
-            <a:pPr lvl="0"/>
-            <a:r>
-              <a:rPr lang="sr-Latn-RS" dirty="0"/>
-              <a:t>U okviru jednog dokumenta ne sme biti polja sa istim nazivima, ali su sumboli . i $ dozvoljeni.</a:t>
-            </a:r>
-            <a:endParaRPr lang="en-US" dirty="0"/>
-          </a:p>
-          <a:p>
-            <a:r>
-              <a:rPr lang="sr-Latn-RS" dirty="0"/>
-              <a:t>Kako bi se pristupilo nekim ugnježdenim vrednostima, Mongo koristi „.“, slično kao što to koriste moderni programski jezici.</a:t>
-            </a:r>
-            <a:endParaRPr lang="en-US" dirty="0"/>
-          </a:p>
-          <a:p>
-            <a:r>
-              <a:rPr lang="sr-Latn-RS" dirty="0"/>
-              <a:t>Maksimalna veličina jednog dokumenta je 16 mebibitova (nije megabajt, označava se sa MiB umesto MB), odnosno oko 16.7 MB. Takođe za razliku od JSON-a, polja u BSON-u su sortirana po engleskom alfabetu rastuće, nalik na rečnik. Jedna od posledica ovoga je što poređenje dva dokumenta sa naizgled istim atributima daje različite rezultate, pa na primer </a:t>
-            </a:r>
-            <a:r>
-              <a:rPr lang="en-US" dirty="0"/>
-              <a:t>{a: 1, b: 1} </a:t>
-            </a:r>
-            <a:r>
-              <a:rPr lang="sr-Latn-RS" dirty="0"/>
-              <a:t>nije isto sa </a:t>
-            </a:r>
-            <a:r>
-              <a:rPr lang="en-US" dirty="0"/>
-              <a:t>{b: 1, a: 1}.</a:t>
-            </a:r>
-          </a:p>
-        </p:txBody>
-      </p:sp>
-    </p:spTree>
-    <p:extLst>
-      <p:ext uri="{BB962C8B-B14F-4D97-AF65-F5344CB8AC3E}">
-        <p14:creationId xmlns:p14="http://schemas.microsoft.com/office/powerpoint/2010/main" val="1647704003"/>
-      </p:ext>
-    </p:extLst>
-  </p:cSld>
-  <p:clrMapOvr>
-    <a:masterClrMapping/>
-  </p:clrMapOvr>
-</p:sld>
-</file>
-
 <file path=ppt/slides/slide15.xml><?xml version="1.0" encoding="utf-8"?>
 <p:sld xmlns:a="http://schemas.openxmlformats.org/drawingml/2006/main" xmlns:r="http://schemas.openxmlformats.org/officeDocument/2006/relationships" xmlns:p="http://schemas.openxmlformats.org/presentationml/2006/main">
   <p:cSld>
@@ -4974,6 +4961,247 @@
           <p:cNvPr id="2" name="Title 1">
             <a:extLst>
               <a:ext uri="{FF2B5EF4-FFF2-40B4-BE49-F238E27FC236}">
+                <a16:creationId xmlns:a16="http://schemas.microsoft.com/office/drawing/2014/main" id="{CA3676A8-406D-585C-1F1E-9893EE3CAC20}"/>
+              </a:ext>
+            </a:extLst>
+          </p:cNvPr>
+          <p:cNvSpPr>
+            <a:spLocks noGrp="1"/>
+          </p:cNvSpPr>
+          <p:nvPr>
+            <p:ph type="title"/>
+          </p:nvPr>
+        </p:nvSpPr>
+        <p:spPr/>
+        <p:txBody>
+          <a:bodyPr/>
+          <a:lstStyle/>
+          <a:p>
+            <a:r>
+              <a:rPr lang="sr-Latn-RS" dirty="0"/>
+              <a:t>Dokumenti</a:t>
+            </a:r>
+            <a:endParaRPr lang="en-US" dirty="0"/>
+          </a:p>
+        </p:txBody>
+      </p:sp>
+      <p:sp>
+        <p:nvSpPr>
+          <p:cNvPr id="3" name="Content Placeholder 2">
+            <a:extLst>
+              <a:ext uri="{FF2B5EF4-FFF2-40B4-BE49-F238E27FC236}">
+                <a16:creationId xmlns:a16="http://schemas.microsoft.com/office/drawing/2014/main" id="{B3F1AD2F-5E96-7676-1C29-35FC13E0481A}"/>
+              </a:ext>
+            </a:extLst>
+          </p:cNvPr>
+          <p:cNvSpPr>
+            <a:spLocks noGrp="1"/>
+          </p:cNvSpPr>
+          <p:nvPr>
+            <p:ph idx="1"/>
+          </p:nvPr>
+        </p:nvSpPr>
+        <p:spPr>
+          <a:xfrm>
+            <a:off x="838199" y="1556238"/>
+            <a:ext cx="10741269" cy="5090747"/>
+          </a:xfrm>
+        </p:spPr>
+        <p:txBody>
+          <a:bodyPr>
+            <a:normAutofit fontScale="70000" lnSpcReduction="20000"/>
+          </a:bodyPr>
+          <a:lstStyle/>
+          <a:p>
+            <a:r>
+              <a:rPr lang="sr-Latn-RS" dirty="0"/>
+              <a:t>Dokument je osnovna jedinica čuvanja podataka kod Monga. Slični su JSON objektima i sastoji se od parova polje-vrednost, pri čemu vrednost može biti bilo šta, od broja, stringa, listi do drugog dokumenta. Ideja iza ove strukture je da podaci liče što više moguće na ono što se koristi u aplikacijama kako bi se smanjo broj ili potreba za spojevima koji se koriste u relacionim bazama podataka.</a:t>
+            </a:r>
+          </a:p>
+          <a:p>
+            <a:r>
+              <a:rPr lang="sr-Latn-RS" dirty="0"/>
+              <a:t>Podaci se čuvaju u BSON formatu, koji je binarna predstava JSON-a koji pored toga ima više tipova podataka od njega.</a:t>
+            </a:r>
+          </a:p>
+          <a:p>
+            <a:r>
+              <a:rPr lang="sr-Latn-RS" dirty="0"/>
+              <a:t>Svaki objekat u ovoj bazi mora imati _id polje, a ovde se može videti da je u polju </a:t>
+            </a:r>
+            <a:r>
+              <a:rPr lang="sr-Latn-RS" i="1" dirty="0"/>
+              <a:t>name</a:t>
+            </a:r>
+            <a:r>
+              <a:rPr lang="sr-Latn-RS" dirty="0"/>
+              <a:t> kao vrednost ubačen drugi dokument sa imenom i prezimenom. Postoje i neka ograničenja u imenovanju tih polja:</a:t>
+            </a:r>
+            <a:endParaRPr lang="en-US" dirty="0"/>
+          </a:p>
+          <a:p>
+            <a:pPr lvl="1"/>
+            <a:r>
+              <a:rPr lang="sr-Latn-RS" dirty="0"/>
+              <a:t>_id mora biti jedinstven i nepromenljiv unutar kolekcije pošto služi kao primarni ključ. Može biti bilo šta osim niza i regex-a. Ako ovo polje sadrži potpolja unutar sebe, nijedno od njih ne sme imati $.</a:t>
+            </a:r>
+            <a:endParaRPr lang="en-US" dirty="0"/>
+          </a:p>
+          <a:p>
+            <a:pPr lvl="1"/>
+            <a:r>
+              <a:rPr lang="sr-Latn-RS" dirty="0"/>
+              <a:t>Imena polja ne smeju sadržati karakter </a:t>
+            </a:r>
+            <a:r>
+              <a:rPr lang="sr-Latn-RS" i="1" dirty="0"/>
+              <a:t>null</a:t>
+            </a:r>
+            <a:r>
+              <a:rPr lang="sr-Latn-RS" dirty="0"/>
+              <a:t>.</a:t>
+            </a:r>
+            <a:endParaRPr lang="en-US" dirty="0"/>
+          </a:p>
+          <a:p>
+            <a:pPr lvl="1"/>
+            <a:r>
+              <a:rPr lang="sr-Latn-RS" dirty="0"/>
+              <a:t>U okviru jednog dokumenta ne sme biti polja sa istim nazivima, ali su sumboli . i $ dozvoljeni.</a:t>
+            </a:r>
+            <a:endParaRPr lang="en-US" dirty="0"/>
+          </a:p>
+          <a:p>
+            <a:pPr lvl="1"/>
+            <a:r>
+              <a:rPr lang="sr-Latn-RS" dirty="0"/>
+              <a:t>Kako bi se pristupilo nekim ugnježdenim vrednostima, Mongo koristi „.“, slično kao što to koriste moderni programski jezici.</a:t>
+            </a:r>
+            <a:endParaRPr lang="en-US" dirty="0"/>
+          </a:p>
+          <a:p>
+            <a:r>
+              <a:rPr lang="sr-Latn-RS" dirty="0"/>
+              <a:t>Maksimalna veličina jednog dokumenta je 16 mebibitova (nije megabajt, označava se sa MiB umesto MB), odnosno oko 16.7 MB. Takođe za razliku od JSON-a, polja u BSON-u su sortirana po engleskom alfabetu rastuće, nalik na rečnik. Jedna od posledica ovoga je što poređenje dva dokumenta sa naizgled istim atributima daje različite rezultate, pa na primer </a:t>
+            </a:r>
+            <a:r>
+              <a:rPr lang="en-US" dirty="0"/>
+              <a:t>{a: 1, b: 1} </a:t>
+            </a:r>
+            <a:r>
+              <a:rPr lang="sr-Latn-RS" dirty="0"/>
+              <a:t>nije isto sa </a:t>
+            </a:r>
+            <a:r>
+              <a:rPr lang="en-US" dirty="0"/>
+              <a:t>{b: 1, a: 1}.</a:t>
+            </a:r>
+          </a:p>
+        </p:txBody>
+      </p:sp>
+    </p:spTree>
+    <p:extLst>
+      <p:ext uri="{BB962C8B-B14F-4D97-AF65-F5344CB8AC3E}">
+        <p14:creationId xmlns:p14="http://schemas.microsoft.com/office/powerpoint/2010/main" val="1647704003"/>
+      </p:ext>
+    </p:extLst>
+  </p:cSld>
+  <p:clrMapOvr>
+    <a:masterClrMapping/>
+  </p:clrMapOvr>
+</p:sld>
+</file>
+
+<file path=ppt/slides/slide16.xml><?xml version="1.0" encoding="utf-8"?>
+<p:sld xmlns:a="http://schemas.openxmlformats.org/drawingml/2006/main" xmlns:r="http://schemas.openxmlformats.org/officeDocument/2006/relationships" xmlns:p="http://schemas.openxmlformats.org/presentationml/2006/main">
+  <p:cSld>
+    <p:bg>
+      <p:bgPr>
+        <a:solidFill>
+          <a:schemeClr val="bg1"/>
+        </a:solidFill>
+        <a:effectLst/>
+      </p:bgPr>
+    </p:bg>
+    <p:spTree>
+      <p:nvGrpSpPr>
+        <p:cNvPr id="1" name=""/>
+        <p:cNvGrpSpPr/>
+        <p:nvPr/>
+      </p:nvGrpSpPr>
+      <p:grpSpPr>
+        <a:xfrm>
+          <a:off x="0" y="0"/>
+          <a:ext cx="0" cy="0"/>
+          <a:chOff x="0" y="0"/>
+          <a:chExt cx="0" cy="0"/>
+        </a:xfrm>
+      </p:grpSpPr>
+      <p:sp useBgFill="1">
+        <p:nvSpPr>
+          <p:cNvPr id="10" name="Rectangle 9">
+            <a:extLst>
+              <a:ext uri="{FF2B5EF4-FFF2-40B4-BE49-F238E27FC236}">
+                <a16:creationId xmlns:a16="http://schemas.microsoft.com/office/drawing/2014/main" id="{058A14AF-9FB5-4CC7-BA35-E8E85D3EDF0E}"/>
+              </a:ext>
+              <a:ext uri="{C183D7F6-B498-43B3-948B-1728B52AA6E4}">
+                <adec:decorative xmlns:adec="http://schemas.microsoft.com/office/drawing/2017/decorative" val="1"/>
+              </a:ext>
+            </a:extLst>
+          </p:cNvPr>
+          <p:cNvSpPr>
+            <a:spLocks noGrp="1" noRot="1" noChangeAspect="1" noMove="1" noResize="1" noEditPoints="1" noAdjustHandles="1" noChangeArrowheads="1" noChangeShapeType="1" noTextEdit="1"/>
+          </p:cNvSpPr>
+          <p:nvPr>
+            <p:extLst>
+              <p:ext uri="{386F3935-93C4-4BCD-93E2-E3B085C9AB24}">
+                <p16:designElem xmlns:p16="http://schemas.microsoft.com/office/powerpoint/2015/main" val="1"/>
+              </p:ext>
+            </p:extLst>
+          </p:nvPr>
+        </p:nvSpPr>
+        <p:spPr>
+          <a:xfrm>
+            <a:off x="0" y="0"/>
+            <a:ext cx="12191999" cy="6857365"/>
+          </a:xfrm>
+          <a:prstGeom prst="rect">
+            <a:avLst/>
+          </a:prstGeom>
+          <a:ln>
+            <a:noFill/>
+          </a:ln>
+        </p:spPr>
+        <p:style>
+          <a:lnRef idx="2">
+            <a:schemeClr val="accent1">
+              <a:shade val="50000"/>
+            </a:schemeClr>
+          </a:lnRef>
+          <a:fillRef idx="1">
+            <a:schemeClr val="accent1"/>
+          </a:fillRef>
+          <a:effectRef idx="0">
+            <a:schemeClr val="accent1"/>
+          </a:effectRef>
+          <a:fontRef idx="minor">
+            <a:schemeClr val="lt1"/>
+          </a:fontRef>
+        </p:style>
+        <p:txBody>
+          <a:bodyPr rtlCol="0" anchor="ctr"/>
+          <a:lstStyle/>
+          <a:p>
+            <a:pPr algn="ctr"/>
+            <a:endParaRPr lang="en-US"/>
+          </a:p>
+        </p:txBody>
+      </p:sp>
+      <p:sp>
+        <p:nvSpPr>
+          <p:cNvPr id="2" name="Title 1">
+            <a:extLst>
+              <a:ext uri="{FF2B5EF4-FFF2-40B4-BE49-F238E27FC236}">
                 <a16:creationId xmlns:a16="http://schemas.microsoft.com/office/drawing/2014/main" id="{BA6D1CB9-E27D-A51D-1B87-6B0DE33D6C45}"/>
               </a:ext>
             </a:extLst>
@@ -4985,16 +5213,156 @@
             <p:ph type="title"/>
           </p:nvPr>
         </p:nvSpPr>
-        <p:spPr/>
-        <p:txBody>
-          <a:bodyPr/>
-          <a:lstStyle/>
-          <a:p>
-            <a:r>
-              <a:rPr lang="sr-Latn-RS" dirty="0"/>
+        <p:spPr>
+          <a:xfrm>
+            <a:off x="793662" y="386930"/>
+            <a:ext cx="10066122" cy="1298448"/>
+          </a:xfrm>
+        </p:spPr>
+        <p:txBody>
+          <a:bodyPr anchor="b">
+            <a:normAutofit/>
+          </a:bodyPr>
+          <a:lstStyle/>
+          <a:p>
+            <a:r>
+              <a:rPr lang="sr-Latn-RS" sz="4800"/>
               <a:t>Aggregation pipeline</a:t>
             </a:r>
-            <a:endParaRPr lang="en-US" dirty="0"/>
+            <a:endParaRPr lang="en-US" sz="4800"/>
+          </a:p>
+        </p:txBody>
+      </p:sp>
+      <p:sp>
+        <p:nvSpPr>
+          <p:cNvPr id="12" name="Rectangle 11">
+            <a:extLst>
+              <a:ext uri="{FF2B5EF4-FFF2-40B4-BE49-F238E27FC236}">
+                <a16:creationId xmlns:a16="http://schemas.microsoft.com/office/drawing/2014/main" id="{3A9A4357-BD1D-4622-A4FE-766E6AB8DE84}"/>
+              </a:ext>
+              <a:ext uri="{C183D7F6-B498-43B3-948B-1728B52AA6E4}">
+                <adec:decorative xmlns:adec="http://schemas.microsoft.com/office/drawing/2017/decorative" val="1"/>
+              </a:ext>
+            </a:extLst>
+          </p:cNvPr>
+          <p:cNvSpPr>
+            <a:spLocks noGrp="1" noRot="1" noChangeAspect="1" noMove="1" noResize="1" noEditPoints="1" noAdjustHandles="1" noChangeArrowheads="1" noChangeShapeType="1" noTextEdit="1"/>
+          </p:cNvSpPr>
+          <p:nvPr>
+            <p:extLst>
+              <p:ext uri="{386F3935-93C4-4BCD-93E2-E3B085C9AB24}">
+                <p16:designElem xmlns:p16="http://schemas.microsoft.com/office/powerpoint/2015/main" val="1"/>
+              </p:ext>
+            </p:extLst>
+          </p:nvPr>
+        </p:nvSpPr>
+        <p:spPr>
+          <a:xfrm flipH="1" flipV="1">
+            <a:off x="-2" y="1998845"/>
+            <a:ext cx="11454595" cy="781699"/>
+          </a:xfrm>
+          <a:prstGeom prst="rect">
+            <a:avLst/>
+          </a:prstGeom>
+          <a:solidFill>
+            <a:schemeClr val="accent4"/>
+          </a:solidFill>
+          <a:ln>
+            <a:noFill/>
+          </a:ln>
+        </p:spPr>
+        <p:style>
+          <a:lnRef idx="2">
+            <a:schemeClr val="accent1">
+              <a:shade val="50000"/>
+            </a:schemeClr>
+          </a:lnRef>
+          <a:fillRef idx="1">
+            <a:schemeClr val="accent1"/>
+          </a:fillRef>
+          <a:effectRef idx="0">
+            <a:schemeClr val="accent1"/>
+          </a:effectRef>
+          <a:fontRef idx="minor">
+            <a:schemeClr val="lt1"/>
+          </a:fontRef>
+        </p:style>
+        <p:txBody>
+          <a:bodyPr rtlCol="0" anchor="ctr"/>
+          <a:lstStyle/>
+          <a:p>
+            <a:pPr algn="ctr"/>
+            <a:endParaRPr lang="en-US"/>
+          </a:p>
+        </p:txBody>
+      </p:sp>
+      <p:sp>
+        <p:nvSpPr>
+          <p:cNvPr id="14" name="Rectangle 13">
+            <a:extLst>
+              <a:ext uri="{FF2B5EF4-FFF2-40B4-BE49-F238E27FC236}">
+                <a16:creationId xmlns:a16="http://schemas.microsoft.com/office/drawing/2014/main" id="{E659831F-0D9A-4C63-9EBB-8435B85A440F}"/>
+              </a:ext>
+              <a:ext uri="{C183D7F6-B498-43B3-948B-1728B52AA6E4}">
+                <adec:decorative xmlns:adec="http://schemas.microsoft.com/office/drawing/2017/decorative" val="1"/>
+              </a:ext>
+            </a:extLst>
+          </p:cNvPr>
+          <p:cNvSpPr>
+            <a:spLocks noGrp="1" noRot="1" noChangeAspect="1" noMove="1" noResize="1" noEditPoints="1" noAdjustHandles="1" noChangeArrowheads="1" noChangeShapeType="1" noTextEdit="1"/>
+          </p:cNvSpPr>
+          <p:nvPr>
+            <p:extLst>
+              <p:ext uri="{386F3935-93C4-4BCD-93E2-E3B085C9AB24}">
+                <p16:designElem xmlns:p16="http://schemas.microsoft.com/office/powerpoint/2015/main" val="1"/>
+              </p:ext>
+            </p:extLst>
+          </p:nvPr>
+        </p:nvSpPr>
+        <p:spPr>
+          <a:xfrm>
+            <a:off x="0" y="2203079"/>
+            <a:ext cx="11383362" cy="4267991"/>
+          </a:xfrm>
+          <a:prstGeom prst="rect">
+            <a:avLst/>
+          </a:prstGeom>
+          <a:solidFill>
+            <a:schemeClr val="bg1"/>
+          </a:solidFill>
+          <a:ln>
+            <a:noFill/>
+          </a:ln>
+          <a:effectLst>
+            <a:outerShdw blurRad="139700" dist="127000" dir="5400000" algn="t" rotWithShape="0">
+              <a:prstClr val="black">
+                <a:alpha val="15000"/>
+              </a:prstClr>
+            </a:outerShdw>
+          </a:effectLst>
+        </p:spPr>
+        <p:style>
+          <a:lnRef idx="2">
+            <a:schemeClr val="accent1">
+              <a:shade val="50000"/>
+            </a:schemeClr>
+          </a:lnRef>
+          <a:fillRef idx="1">
+            <a:schemeClr val="accent1"/>
+          </a:fillRef>
+          <a:effectRef idx="0">
+            <a:schemeClr val="accent1"/>
+          </a:effectRef>
+          <a:fontRef idx="minor">
+            <a:schemeClr val="lt1"/>
+          </a:fontRef>
+        </p:style>
+        <p:txBody>
+          <a:bodyPr rtlCol="0" anchor="ctr"/>
+          <a:lstStyle/>
+          <a:p>
+            <a:pPr algn="ctr"/>
+            <a:endParaRPr lang="en-US"/>
           </a:p>
         </p:txBody>
       </p:sp>
@@ -5014,16 +5382,124 @@
             <p:ph idx="1"/>
           </p:nvPr>
         </p:nvSpPr>
-        <p:spPr/>
-        <p:txBody>
-          <a:bodyPr/>
-          <a:lstStyle/>
-          <a:p>
-            <a:r>
-              <a:rPr lang="sr-Latn-RS" dirty="0"/>
-              <a:t>MongoDB ima i svoje operatore čijom kombinacijom se može napraviti takozvani aggregation pipeline koji se koristi za izmenu i modifikaciju podataka. Pipeline se sastoji iz nekoliko koraka ili faza obrade, i svaka koristi neki operator koji počinje sa $, poput $filter, $project, $merge i ostali. Jedan od primera ovakvih pipeline-ova u NodeJS-u je i sledeć</a:t>
-            </a:r>
-            <a:endParaRPr lang="en-US" dirty="0"/>
+        <p:spPr>
+          <a:xfrm>
+            <a:off x="793661" y="2599509"/>
+            <a:ext cx="4530898" cy="3639450"/>
+          </a:xfrm>
+        </p:spPr>
+        <p:txBody>
+          <a:bodyPr anchor="ctr">
+            <a:normAutofit/>
+          </a:bodyPr>
+          <a:lstStyle/>
+          <a:p>
+            <a:r>
+              <a:rPr lang="sr-Latn-RS" sz="2000"/>
+              <a:t>MongoDB ima i svoje operatore čijom kombinacijom se može napraviti takozvani aggregation pipeline koji se koristi za izmenu i modifikaciju podataka. Pipeline se sastoji iz nekoliko koraka ili faza obrade, i svaka koristi neki operator koji počinje sa $, poput $filter, $project, $merge i ostali. Jedan od primera ovakvih pipeline-ova u NodeJS-u je i sledeći:</a:t>
+            </a:r>
+          </a:p>
+          <a:p>
+            <a:endParaRPr lang="en-US" sz="2000"/>
+          </a:p>
+        </p:txBody>
+      </p:sp>
+      <p:pic>
+        <p:nvPicPr>
+          <p:cNvPr id="5" name="Picture 4">
+            <a:extLst>
+              <a:ext uri="{FF2B5EF4-FFF2-40B4-BE49-F238E27FC236}">
+                <a16:creationId xmlns:a16="http://schemas.microsoft.com/office/drawing/2014/main" id="{0E5F0F48-A326-0553-9884-0D834076C3B5}"/>
+              </a:ext>
+            </a:extLst>
+          </p:cNvPr>
+          <p:cNvPicPr>
+            <a:picLocks noChangeAspect="1"/>
+          </p:cNvPicPr>
+          <p:nvPr/>
+        </p:nvPicPr>
+        <p:blipFill>
+          <a:blip r:embed="rId2">
+            <a:extLst>
+              <a:ext uri="{28A0092B-C50C-407E-A947-70E740481C1C}">
+                <a14:useLocalDpi xmlns:a14="http://schemas.microsoft.com/office/drawing/2010/main" val="0"/>
+              </a:ext>
+            </a:extLst>
+          </a:blip>
+          <a:stretch>
+            <a:fillRect/>
+          </a:stretch>
+        </p:blipFill>
+        <p:spPr>
+          <a:xfrm>
+            <a:off x="5911532" y="3182354"/>
+            <a:ext cx="5150277" cy="2318046"/>
+          </a:xfrm>
+          <a:prstGeom prst="rect">
+            <a:avLst/>
+          </a:prstGeom>
+        </p:spPr>
+      </p:pic>
+      <p:sp>
+        <p:nvSpPr>
+          <p:cNvPr id="16" name="Rectangle 15">
+            <a:extLst>
+              <a:ext uri="{FF2B5EF4-FFF2-40B4-BE49-F238E27FC236}">
+                <a16:creationId xmlns:a16="http://schemas.microsoft.com/office/drawing/2014/main" id="{E6995CE5-F890-4ABA-82A2-26507CE8D2A3}"/>
+              </a:ext>
+              <a:ext uri="{C183D7F6-B498-43B3-948B-1728B52AA6E4}">
+                <adec:decorative xmlns:adec="http://schemas.microsoft.com/office/drawing/2017/decorative" val="1"/>
+              </a:ext>
+            </a:extLst>
+          </p:cNvPr>
+          <p:cNvSpPr>
+            <a:spLocks noGrp="1" noRot="1" noChangeAspect="1" noMove="1" noResize="1" noEditPoints="1" noAdjustHandles="1" noChangeArrowheads="1" noChangeShapeType="1" noTextEdit="1"/>
+          </p:cNvSpPr>
+          <p:nvPr>
+            <p:extLst>
+              <p:ext uri="{386F3935-93C4-4BCD-93E2-E3B085C9AB24}">
+                <p16:designElem xmlns:p16="http://schemas.microsoft.com/office/powerpoint/2015/main" val="1"/>
+              </p:ext>
+            </p:extLst>
+          </p:nvPr>
+        </p:nvSpPr>
+        <p:spPr>
+          <a:xfrm rot="5400000">
+            <a:off x="11228040" y="2313027"/>
+            <a:ext cx="781700" cy="152382"/>
+          </a:xfrm>
+          <a:prstGeom prst="rect">
+            <a:avLst/>
+          </a:prstGeom>
+          <a:solidFill>
+            <a:schemeClr val="accent4"/>
+          </a:solidFill>
+          <a:ln>
+            <a:noFill/>
+          </a:ln>
+        </p:spPr>
+        <p:style>
+          <a:lnRef idx="2">
+            <a:schemeClr val="accent1">
+              <a:shade val="50000"/>
+            </a:schemeClr>
+          </a:lnRef>
+          <a:fillRef idx="1">
+            <a:schemeClr val="accent1"/>
+          </a:fillRef>
+          <a:effectRef idx="0">
+            <a:schemeClr val="accent1"/>
+          </a:effectRef>
+          <a:fontRef idx="minor">
+            <a:schemeClr val="lt1"/>
+          </a:fontRef>
+        </p:style>
+        <p:txBody>
+          <a:bodyPr rtlCol="0" anchor="ctr"/>
+          <a:lstStyle/>
+          <a:p>
+            <a:pPr algn="ctr"/>
+            <a:endParaRPr lang="en-US"/>
           </a:p>
         </p:txBody>
       </p:sp>
@@ -5040,7 +5516,7 @@
 </p:sld>
 </file>
 
-<file path=ppt/slides/slide16.xml><?xml version="1.0" encoding="utf-8"?>
+<file path=ppt/slides/slide17.xml><?xml version="1.0" encoding="utf-8"?>
 <p:sld xmlns:a="http://schemas.openxmlformats.org/drawingml/2006/main" xmlns:r="http://schemas.openxmlformats.org/officeDocument/2006/relationships" xmlns:p="http://schemas.openxmlformats.org/presentationml/2006/main">
   <p:cSld>
     <p:spTree>
@@ -5079,10 +5555,10 @@
           <a:lstStyle/>
           <a:p>
             <a:r>
-              <a:rPr lang="sr-Latn-RS"/>
+              <a:rPr lang="sr-Latn-RS" dirty="0"/>
               <a:t>Performanse</a:t>
             </a:r>
-            <a:endParaRPr lang="en-US"/>
+            <a:endParaRPr lang="en-US" dirty="0"/>
           </a:p>
         </p:txBody>
       </p:sp>
@@ -5104,10 +5580,29 @@
         </p:nvSpPr>
         <p:spPr/>
         <p:txBody>
-          <a:bodyPr/>
-          <a:lstStyle/>
-          <a:p>
-            <a:endParaRPr lang="en-US"/>
+          <a:bodyPr>
+            <a:normAutofit fontScale="85000" lnSpcReduction="20000"/>
+          </a:bodyPr>
+          <a:lstStyle/>
+          <a:p>
+            <a:r>
+              <a:rPr lang="sr-Latn-RS" dirty="0"/>
+              <a:t>Glavne stvari koje utiču na performanse u MongoDB-u su šema, aggregation pipeline i indeksi. Ako je šema loše napravljena, ako su operatori u pipeline-u loše organizovani i ako nema indeksa, stvari mogu dosta da se uspore. </a:t>
+            </a:r>
+            <a:endParaRPr lang="en-US" dirty="0"/>
+          </a:p>
+          <a:p>
+            <a:r>
+              <a:rPr lang="sr-Latn-RS" dirty="0"/>
+              <a:t>Kako bi aggregation pipeline bio što efikasniji, $match treba biti upotrebljen što ranije u ovom toku. To ograničava broj dokumenata u kolekciji sa kojim se radi, što samim tim ubrzava sam postupak. Još je bolje ako se napravi indeks nad nekim poljima nad kojima se kasnije izvrši $match. U suštini, treba izbegavati operacije koje skeniraju celu kolekciju, i potrebno je dobro dizajnirati šemu.</a:t>
+            </a:r>
+          </a:p>
+          <a:p>
+            <a:r>
+              <a:rPr lang="sr-Latn-RS" dirty="0"/>
+              <a:t>Jedna analiza i refaktor pipeline-a je doveo do toga da se upotreba CPU-a smanji sa 100% na 15% tako što su identifikovani dokumenti kojima se često pristupa, koji su izdvojeni u zasebnu kolekciju, odrađen je refaktor pipeline-a i šeme, što je dovelo do novčanih ušteda, zbog bržih upita koji troše manje resursa i koji se izvršavaju ispod 100ms</a:t>
+            </a:r>
+            <a:endParaRPr lang="en-US" dirty="0"/>
           </a:p>
         </p:txBody>
       </p:sp>
@@ -5115,6 +5610,102 @@
     <p:extLst>
       <p:ext uri="{BB962C8B-B14F-4D97-AF65-F5344CB8AC3E}">
         <p14:creationId xmlns:p14="http://schemas.microsoft.com/office/powerpoint/2010/main" val="893872459"/>
+      </p:ext>
+    </p:extLst>
+  </p:cSld>
+  <p:clrMapOvr>
+    <a:masterClrMapping/>
+  </p:clrMapOvr>
+</p:sld>
+</file>
+
+<file path=ppt/slides/slide18.xml><?xml version="1.0" encoding="utf-8"?>
+<p:sld xmlns:a="http://schemas.openxmlformats.org/drawingml/2006/main" xmlns:r="http://schemas.openxmlformats.org/officeDocument/2006/relationships" xmlns:p="http://schemas.openxmlformats.org/presentationml/2006/main">
+  <p:cSld>
+    <p:spTree>
+      <p:nvGrpSpPr>
+        <p:cNvPr id="1" name=""/>
+        <p:cNvGrpSpPr/>
+        <p:nvPr/>
+      </p:nvGrpSpPr>
+      <p:grpSpPr>
+        <a:xfrm>
+          <a:off x="0" y="0"/>
+          <a:ext cx="0" cy="0"/>
+          <a:chOff x="0" y="0"/>
+          <a:chExt cx="0" cy="0"/>
+        </a:xfrm>
+      </p:grpSpPr>
+      <p:sp>
+        <p:nvSpPr>
+          <p:cNvPr id="2" name="Title 1">
+            <a:extLst>
+              <a:ext uri="{FF2B5EF4-FFF2-40B4-BE49-F238E27FC236}">
+                <a16:creationId xmlns:a16="http://schemas.microsoft.com/office/drawing/2014/main" id="{72B16D53-61BC-9BF6-767C-70CB438325AD}"/>
+              </a:ext>
+            </a:extLst>
+          </p:cNvPr>
+          <p:cNvSpPr>
+            <a:spLocks noGrp="1"/>
+          </p:cNvSpPr>
+          <p:nvPr>
+            <p:ph type="title"/>
+          </p:nvPr>
+        </p:nvSpPr>
+        <p:spPr/>
+        <p:txBody>
+          <a:bodyPr/>
+          <a:lstStyle/>
+          <a:p>
+            <a:pPr algn="ctr"/>
+            <a:r>
+              <a:rPr lang="sr-Latn-RS" dirty="0"/>
+              <a:t>Redis vs MongoDB</a:t>
+            </a:r>
+            <a:endParaRPr lang="en-US" dirty="0"/>
+          </a:p>
+        </p:txBody>
+      </p:sp>
+      <p:pic>
+        <p:nvPicPr>
+          <p:cNvPr id="5" name="Picture 4">
+            <a:extLst>
+              <a:ext uri="{FF2B5EF4-FFF2-40B4-BE49-F238E27FC236}">
+                <a16:creationId xmlns:a16="http://schemas.microsoft.com/office/drawing/2014/main" id="{48D72DF7-9534-6921-888C-C2A3AB710E9F}"/>
+              </a:ext>
+            </a:extLst>
+          </p:cNvPr>
+          <p:cNvPicPr>
+            <a:picLocks noChangeAspect="1"/>
+          </p:cNvPicPr>
+          <p:nvPr/>
+        </p:nvPicPr>
+        <p:blipFill>
+          <a:blip r:embed="rId2">
+            <a:extLst>
+              <a:ext uri="{28A0092B-C50C-407E-A947-70E740481C1C}">
+                <a14:useLocalDpi xmlns:a14="http://schemas.microsoft.com/office/drawing/2010/main" val="0"/>
+              </a:ext>
+            </a:extLst>
+          </a:blip>
+          <a:stretch>
+            <a:fillRect/>
+          </a:stretch>
+        </p:blipFill>
+        <p:spPr>
+          <a:xfrm>
+            <a:off x="1565005" y="1433262"/>
+            <a:ext cx="8784491" cy="4862029"/>
+          </a:xfrm>
+          <a:prstGeom prst="rect">
+            <a:avLst/>
+          </a:prstGeom>
+        </p:spPr>
+      </p:pic>
+    </p:spTree>
+    <p:extLst>
+      <p:ext uri="{BB962C8B-B14F-4D97-AF65-F5344CB8AC3E}">
+        <p14:creationId xmlns:p14="http://schemas.microsoft.com/office/powerpoint/2010/main" val="2902811200"/>
       </p:ext>
     </p:extLst>
   </p:cSld>
